--- a/slides/03-3-Karatsuba.pptx
+++ b/slides/03-3-Karatsuba.pptx
@@ -211,7 +211,7 @@
           <a:p>
             <a:fld id="{C5B45307-6ED4-B142-BD64-10F739779302}" type="datetimeFigureOut">
               <a:rPr lang="en-US" smtClean="0"/>
-              <a:t>8/20/25</a:t>
+              <a:t>9/26/25</a:t>
             </a:fld>
             <a:endParaRPr lang="en-US"/>
           </a:p>
@@ -2399,7 +2399,7 @@
           <a:noFill/>
           <a:extLst>
             <a:ext uri="{909E8E84-426E-40dd-AFC4-6F175D3DCCD1}">
-              <a14:hiddenFill xmlns:a14="http://schemas.microsoft.com/office/drawing/2010/main" xmlns="">
+              <a14:hiddenFill xmlns="" xmlns:a14="http://schemas.microsoft.com/office/drawing/2010/main">
                 <a:solidFill>
                   <a:srgbClr val="FFFFFF"/>
                 </a:solidFill>
@@ -2458,7 +2458,7 @@
             </a:ln>
             <a:extLst>
               <a:ext uri="{91240B29-F687-4f45-9708-019B960494DF}">
-                <a14:hiddenLine xmlns:a14="http://schemas.microsoft.com/office/drawing/2010/main" xmlns="" w="9525">
+                <a14:hiddenLine xmlns="" xmlns:a14="http://schemas.microsoft.com/office/drawing/2010/main" w="9525">
                   <a:solidFill>
                     <a:srgbClr val="000000"/>
                   </a:solidFill>
@@ -2548,7 +2548,7 @@
             </a:ln>
             <a:extLst>
               <a:ext uri="{91240B29-F687-4f45-9708-019B960494DF}">
-                <a14:hiddenLine xmlns:a14="http://schemas.microsoft.com/office/drawing/2010/main" xmlns="" w="9525">
+                <a14:hiddenLine xmlns="" xmlns:a14="http://schemas.microsoft.com/office/drawing/2010/main" w="9525">
                   <a:solidFill>
                     <a:srgbClr val="000000"/>
                   </a:solidFill>
@@ -2638,7 +2638,7 @@
             </a:ln>
             <a:extLst>
               <a:ext uri="{91240B29-F687-4f45-9708-019B960494DF}">
-                <a14:hiddenLine xmlns:a14="http://schemas.microsoft.com/office/drawing/2010/main" xmlns="" w="9525">
+                <a14:hiddenLine xmlns="" xmlns:a14="http://schemas.microsoft.com/office/drawing/2010/main" w="9525">
                   <a:solidFill>
                     <a:srgbClr val="000000"/>
                   </a:solidFill>
@@ -2672,7 +2672,7 @@
             </a:ln>
             <a:extLst>
               <a:ext uri="{91240B29-F687-4f45-9708-019B960494DF}">
-                <a14:hiddenLine xmlns:a14="http://schemas.microsoft.com/office/drawing/2010/main" xmlns="" w="9525">
+                <a14:hiddenLine xmlns="" xmlns:a14="http://schemas.microsoft.com/office/drawing/2010/main" w="9525">
                   <a:solidFill>
                     <a:srgbClr val="000000"/>
                   </a:solidFill>
@@ -2762,7 +2762,7 @@
             </a:ln>
             <a:extLst>
               <a:ext uri="{91240B29-F687-4f45-9708-019B960494DF}">
-                <a14:hiddenLine xmlns:a14="http://schemas.microsoft.com/office/drawing/2010/main" xmlns="" w="9525">
+                <a14:hiddenLine xmlns="" xmlns:a14="http://schemas.microsoft.com/office/drawing/2010/main" w="9525">
                   <a:solidFill>
                     <a:srgbClr val="000000"/>
                   </a:solidFill>
@@ -2824,7 +2824,7 @@
             </a:ln>
             <a:extLst>
               <a:ext uri="{91240B29-F687-4f45-9708-019B960494DF}">
-                <a14:hiddenLine xmlns:a14="http://schemas.microsoft.com/office/drawing/2010/main" xmlns="" w="9525">
+                <a14:hiddenLine xmlns="" xmlns:a14="http://schemas.microsoft.com/office/drawing/2010/main" w="9525">
                   <a:solidFill>
                     <a:srgbClr val="000000"/>
                   </a:solidFill>
@@ -2886,7 +2886,7 @@
             </a:ln>
             <a:extLst>
               <a:ext uri="{91240B29-F687-4f45-9708-019B960494DF}">
-                <a14:hiddenLine xmlns:a14="http://schemas.microsoft.com/office/drawing/2010/main" xmlns="" w="9525">
+                <a14:hiddenLine xmlns="" xmlns:a14="http://schemas.microsoft.com/office/drawing/2010/main" w="9525">
                   <a:solidFill>
                     <a:srgbClr val="000000"/>
                   </a:solidFill>
@@ -2976,7 +2976,7 @@
             </a:ln>
             <a:extLst>
               <a:ext uri="{91240B29-F687-4f45-9708-019B960494DF}">
-                <a14:hiddenLine xmlns:a14="http://schemas.microsoft.com/office/drawing/2010/main" xmlns="" w="9525">
+                <a14:hiddenLine xmlns="" xmlns:a14="http://schemas.microsoft.com/office/drawing/2010/main" w="9525">
                   <a:solidFill>
                     <a:srgbClr val="000000"/>
                   </a:solidFill>
@@ -3038,7 +3038,7 @@
             </a:ln>
             <a:extLst>
               <a:ext uri="{91240B29-F687-4f45-9708-019B960494DF}">
-                <a14:hiddenLine xmlns:a14="http://schemas.microsoft.com/office/drawing/2010/main" xmlns="" w="9525">
+                <a14:hiddenLine xmlns="" xmlns:a14="http://schemas.microsoft.com/office/drawing/2010/main" w="9525">
                   <a:solidFill>
                     <a:srgbClr val="000000"/>
                   </a:solidFill>
@@ -3100,7 +3100,7 @@
             </a:ln>
             <a:extLst>
               <a:ext uri="{91240B29-F687-4f45-9708-019B960494DF}">
-                <a14:hiddenLine xmlns:a14="http://schemas.microsoft.com/office/drawing/2010/main" xmlns="" w="9525">
+                <a14:hiddenLine xmlns="" xmlns:a14="http://schemas.microsoft.com/office/drawing/2010/main" w="9525">
                   <a:solidFill>
                     <a:srgbClr val="000000"/>
                   </a:solidFill>
@@ -3190,7 +3190,7 @@
             </a:ln>
             <a:extLst>
               <a:ext uri="{91240B29-F687-4f45-9708-019B960494DF}">
-                <a14:hiddenLine xmlns:a14="http://schemas.microsoft.com/office/drawing/2010/main" xmlns="" w="9525">
+                <a14:hiddenLine xmlns="" xmlns:a14="http://schemas.microsoft.com/office/drawing/2010/main" w="9525">
                   <a:solidFill>
                     <a:srgbClr val="000000"/>
                   </a:solidFill>
@@ -3280,7 +3280,7 @@
             </a:ln>
             <a:extLst>
               <a:ext uri="{91240B29-F687-4f45-9708-019B960494DF}">
-                <a14:hiddenLine xmlns:a14="http://schemas.microsoft.com/office/drawing/2010/main" xmlns="" w="9525">
+                <a14:hiddenLine xmlns="" xmlns:a14="http://schemas.microsoft.com/office/drawing/2010/main" w="9525">
                   <a:solidFill>
                     <a:srgbClr val="000000"/>
                   </a:solidFill>
@@ -3342,7 +3342,7 @@
             </a:ln>
             <a:extLst>
               <a:ext uri="{91240B29-F687-4f45-9708-019B960494DF}">
-                <a14:hiddenLine xmlns:a14="http://schemas.microsoft.com/office/drawing/2010/main" xmlns="" w="9525">
+                <a14:hiddenLine xmlns="" xmlns:a14="http://schemas.microsoft.com/office/drawing/2010/main" w="9525">
                   <a:solidFill>
                     <a:srgbClr val="000000"/>
                   </a:solidFill>
@@ -3452,7 +3452,7 @@
             </a:ln>
             <a:extLst>
               <a:ext uri="{91240B29-F687-4f45-9708-019B960494DF}">
-                <a14:hiddenLine xmlns:a14="http://schemas.microsoft.com/office/drawing/2010/main" xmlns="" w="9525">
+                <a14:hiddenLine xmlns="" xmlns:a14="http://schemas.microsoft.com/office/drawing/2010/main" w="9525">
                   <a:solidFill>
                     <a:srgbClr val="000000"/>
                   </a:solidFill>
@@ -3514,7 +3514,7 @@
             </a:ln>
             <a:extLst>
               <a:ext uri="{91240B29-F687-4f45-9708-019B960494DF}">
-                <a14:hiddenLine xmlns:a14="http://schemas.microsoft.com/office/drawing/2010/main" xmlns="" w="9525">
+                <a14:hiddenLine xmlns="" xmlns:a14="http://schemas.microsoft.com/office/drawing/2010/main" w="9525">
                   <a:solidFill>
                     <a:srgbClr val="000000"/>
                   </a:solidFill>
@@ -3604,7 +3604,7 @@
             </a:ln>
             <a:extLst>
               <a:ext uri="{91240B29-F687-4f45-9708-019B960494DF}">
-                <a14:hiddenLine xmlns:a14="http://schemas.microsoft.com/office/drawing/2010/main" xmlns="" w="9525">
+                <a14:hiddenLine xmlns="" xmlns:a14="http://schemas.microsoft.com/office/drawing/2010/main" w="9525">
                   <a:solidFill>
                     <a:srgbClr val="000000"/>
                   </a:solidFill>
@@ -3694,7 +3694,7 @@
             </a:ln>
             <a:extLst>
               <a:ext uri="{91240B29-F687-4f45-9708-019B960494DF}">
-                <a14:hiddenLine xmlns:a14="http://schemas.microsoft.com/office/drawing/2010/main" xmlns="" w="9525">
+                <a14:hiddenLine xmlns="" xmlns:a14="http://schemas.microsoft.com/office/drawing/2010/main" w="9525">
                   <a:solidFill>
                     <a:srgbClr val="000000"/>
                   </a:solidFill>
@@ -3756,7 +3756,7 @@
             </a:ln>
             <a:extLst>
               <a:ext uri="{91240B29-F687-4f45-9708-019B960494DF}">
-                <a14:hiddenLine xmlns:a14="http://schemas.microsoft.com/office/drawing/2010/main" xmlns="" w="9525">
+                <a14:hiddenLine xmlns="" xmlns:a14="http://schemas.microsoft.com/office/drawing/2010/main" w="9525">
                   <a:solidFill>
                     <a:srgbClr val="000000"/>
                   </a:solidFill>
@@ -3846,7 +3846,7 @@
             </a:ln>
             <a:extLst>
               <a:ext uri="{91240B29-F687-4f45-9708-019B960494DF}">
-                <a14:hiddenLine xmlns:a14="http://schemas.microsoft.com/office/drawing/2010/main" xmlns="" w="9525">
+                <a14:hiddenLine xmlns="" xmlns:a14="http://schemas.microsoft.com/office/drawing/2010/main" w="9525">
                   <a:solidFill>
                     <a:srgbClr val="000000"/>
                   </a:solidFill>
@@ -3936,7 +3936,7 @@
             </a:ln>
             <a:extLst>
               <a:ext uri="{91240B29-F687-4f45-9708-019B960494DF}">
-                <a14:hiddenLine xmlns:a14="http://schemas.microsoft.com/office/drawing/2010/main" xmlns="" w="9525">
+                <a14:hiddenLine xmlns="" xmlns:a14="http://schemas.microsoft.com/office/drawing/2010/main" w="9525">
                   <a:solidFill>
                     <a:srgbClr val="000000"/>
                   </a:solidFill>
@@ -3992,7 +3992,7 @@
             </a:ln>
             <a:extLst>
               <a:ext uri="{91240B29-F687-4f45-9708-019B960494DF}">
-                <a14:hiddenLine xmlns:a14="http://schemas.microsoft.com/office/drawing/2010/main" xmlns="" w="9525">
+                <a14:hiddenLine xmlns="" xmlns:a14="http://schemas.microsoft.com/office/drawing/2010/main" w="9525">
                   <a:solidFill>
                     <a:srgbClr val="000000"/>
                   </a:solidFill>
@@ -4082,7 +4082,7 @@
             </a:ln>
             <a:extLst>
               <a:ext uri="{91240B29-F687-4f45-9708-019B960494DF}">
-                <a14:hiddenLine xmlns:a14="http://schemas.microsoft.com/office/drawing/2010/main" xmlns="" w="9525">
+                <a14:hiddenLine xmlns="" xmlns:a14="http://schemas.microsoft.com/office/drawing/2010/main" w="9525">
                   <a:solidFill>
                     <a:srgbClr val="000000"/>
                   </a:solidFill>
@@ -4138,7 +4138,7 @@
             </a:ln>
             <a:extLst>
               <a:ext uri="{91240B29-F687-4f45-9708-019B960494DF}">
-                <a14:hiddenLine xmlns:a14="http://schemas.microsoft.com/office/drawing/2010/main" xmlns="" w="9525">
+                <a14:hiddenLine xmlns="" xmlns:a14="http://schemas.microsoft.com/office/drawing/2010/main" w="9525">
                   <a:solidFill>
                     <a:srgbClr val="000000"/>
                   </a:solidFill>
@@ -4228,7 +4228,7 @@
             </a:ln>
             <a:extLst>
               <a:ext uri="{91240B29-F687-4f45-9708-019B960494DF}">
-                <a14:hiddenLine xmlns:a14="http://schemas.microsoft.com/office/drawing/2010/main" xmlns="" w="9525">
+                <a14:hiddenLine xmlns="" xmlns:a14="http://schemas.microsoft.com/office/drawing/2010/main" w="9525">
                   <a:solidFill>
                     <a:srgbClr val="000000"/>
                   </a:solidFill>
@@ -4296,7 +4296,7 @@
             </a:ln>
             <a:extLst>
               <a:ext uri="{91240B29-F687-4f45-9708-019B960494DF}">
-                <a14:hiddenLine xmlns:a14="http://schemas.microsoft.com/office/drawing/2010/main" xmlns="" w="9525">
+                <a14:hiddenLine xmlns="" xmlns:a14="http://schemas.microsoft.com/office/drawing/2010/main" w="9525">
                   <a:solidFill>
                     <a:srgbClr val="000000"/>
                   </a:solidFill>
@@ -4386,7 +4386,7 @@
             </a:ln>
             <a:extLst>
               <a:ext uri="{91240B29-F687-4f45-9708-019B960494DF}">
-                <a14:hiddenLine xmlns:a14="http://schemas.microsoft.com/office/drawing/2010/main" xmlns="" w="9525">
+                <a14:hiddenLine xmlns="" xmlns:a14="http://schemas.microsoft.com/office/drawing/2010/main" w="9525">
                   <a:solidFill>
                     <a:srgbClr val="000000"/>
                   </a:solidFill>
@@ -4454,7 +4454,7 @@
             </a:ln>
             <a:extLst>
               <a:ext uri="{91240B29-F687-4f45-9708-019B960494DF}">
-                <a14:hiddenLine xmlns:a14="http://schemas.microsoft.com/office/drawing/2010/main" xmlns="" w="9525">
+                <a14:hiddenLine xmlns="" xmlns:a14="http://schemas.microsoft.com/office/drawing/2010/main" w="9525">
                   <a:solidFill>
                     <a:srgbClr val="000000"/>
                   </a:solidFill>
@@ -4544,7 +4544,7 @@
             </a:ln>
             <a:extLst>
               <a:ext uri="{91240B29-F687-4f45-9708-019B960494DF}">
-                <a14:hiddenLine xmlns:a14="http://schemas.microsoft.com/office/drawing/2010/main" xmlns="" w="9525">
+                <a14:hiddenLine xmlns="" xmlns:a14="http://schemas.microsoft.com/office/drawing/2010/main" w="9525">
                   <a:solidFill>
                     <a:srgbClr val="000000"/>
                   </a:solidFill>
@@ -4578,7 +4578,7 @@
             </a:ln>
             <a:extLst>
               <a:ext uri="{91240B29-F687-4f45-9708-019B960494DF}">
-                <a14:hiddenLine xmlns:a14="http://schemas.microsoft.com/office/drawing/2010/main" xmlns="" w="9525">
+                <a14:hiddenLine xmlns="" xmlns:a14="http://schemas.microsoft.com/office/drawing/2010/main" w="9525">
                   <a:solidFill>
                     <a:srgbClr val="000000"/>
                   </a:solidFill>
@@ -4668,7 +4668,7 @@
             </a:ln>
             <a:extLst>
               <a:ext uri="{91240B29-F687-4f45-9708-019B960494DF}">
-                <a14:hiddenLine xmlns:a14="http://schemas.microsoft.com/office/drawing/2010/main" xmlns="" w="9525">
+                <a14:hiddenLine xmlns="" xmlns:a14="http://schemas.microsoft.com/office/drawing/2010/main" w="9525">
                   <a:solidFill>
                     <a:srgbClr val="000000"/>
                   </a:solidFill>
@@ -4730,7 +4730,7 @@
             </a:ln>
             <a:extLst>
               <a:ext uri="{91240B29-F687-4f45-9708-019B960494DF}">
-                <a14:hiddenLine xmlns:a14="http://schemas.microsoft.com/office/drawing/2010/main" xmlns="" w="9525">
+                <a14:hiddenLine xmlns="" xmlns:a14="http://schemas.microsoft.com/office/drawing/2010/main" w="9525">
                   <a:solidFill>
                     <a:srgbClr val="000000"/>
                   </a:solidFill>
@@ -4792,7 +4792,7 @@
             </a:ln>
             <a:extLst>
               <a:ext uri="{91240B29-F687-4f45-9708-019B960494DF}">
-                <a14:hiddenLine xmlns:a14="http://schemas.microsoft.com/office/drawing/2010/main" xmlns="" w="9525">
+                <a14:hiddenLine xmlns="" xmlns:a14="http://schemas.microsoft.com/office/drawing/2010/main" w="9525">
                   <a:solidFill>
                     <a:srgbClr val="000000"/>
                   </a:solidFill>
@@ -4882,7 +4882,7 @@
             </a:ln>
             <a:extLst>
               <a:ext uri="{91240B29-F687-4f45-9708-019B960494DF}">
-                <a14:hiddenLine xmlns:a14="http://schemas.microsoft.com/office/drawing/2010/main" xmlns="" w="9525">
+                <a14:hiddenLine xmlns="" xmlns:a14="http://schemas.microsoft.com/office/drawing/2010/main" w="9525">
                   <a:solidFill>
                     <a:srgbClr val="000000"/>
                   </a:solidFill>
@@ -4950,7 +4950,7 @@
             </a:ln>
             <a:extLst>
               <a:ext uri="{91240B29-F687-4f45-9708-019B960494DF}">
-                <a14:hiddenLine xmlns:a14="http://schemas.microsoft.com/office/drawing/2010/main" xmlns="" w="9525">
+                <a14:hiddenLine xmlns="" xmlns:a14="http://schemas.microsoft.com/office/drawing/2010/main" w="9525">
                   <a:solidFill>
                     <a:srgbClr val="000000"/>
                   </a:solidFill>
@@ -5012,7 +5012,7 @@
             </a:ln>
             <a:extLst>
               <a:ext uri="{91240B29-F687-4f45-9708-019B960494DF}">
-                <a14:hiddenLine xmlns:a14="http://schemas.microsoft.com/office/drawing/2010/main" xmlns="" w="9525">
+                <a14:hiddenLine xmlns="" xmlns:a14="http://schemas.microsoft.com/office/drawing/2010/main" w="9525">
                   <a:solidFill>
                     <a:srgbClr val="000000"/>
                   </a:solidFill>
@@ -5102,7 +5102,7 @@
             </a:ln>
             <a:extLst>
               <a:ext uri="{91240B29-F687-4f45-9708-019B960494DF}">
-                <a14:hiddenLine xmlns:a14="http://schemas.microsoft.com/office/drawing/2010/main" xmlns="" w="9525">
+                <a14:hiddenLine xmlns="" xmlns:a14="http://schemas.microsoft.com/office/drawing/2010/main" w="9525">
                   <a:solidFill>
                     <a:srgbClr val="000000"/>
                   </a:solidFill>
@@ -5164,7 +5164,7 @@
             </a:ln>
             <a:extLst>
               <a:ext uri="{91240B29-F687-4f45-9708-019B960494DF}">
-                <a14:hiddenLine xmlns:a14="http://schemas.microsoft.com/office/drawing/2010/main" xmlns="" w="9525">
+                <a14:hiddenLine xmlns="" xmlns:a14="http://schemas.microsoft.com/office/drawing/2010/main" w="9525">
                   <a:solidFill>
                     <a:srgbClr val="000000"/>
                   </a:solidFill>
@@ -5254,7 +5254,7 @@
             </a:ln>
             <a:extLst>
               <a:ext uri="{91240B29-F687-4f45-9708-019B960494DF}">
-                <a14:hiddenLine xmlns:a14="http://schemas.microsoft.com/office/drawing/2010/main" xmlns="" w="9525">
+                <a14:hiddenLine xmlns="" xmlns:a14="http://schemas.microsoft.com/office/drawing/2010/main" w="9525">
                   <a:solidFill>
                     <a:srgbClr val="000000"/>
                   </a:solidFill>
@@ -5316,7 +5316,7 @@
             </a:ln>
             <a:extLst>
               <a:ext uri="{91240B29-F687-4f45-9708-019B960494DF}">
-                <a14:hiddenLine xmlns:a14="http://schemas.microsoft.com/office/drawing/2010/main" xmlns="" w="9525">
+                <a14:hiddenLine xmlns="" xmlns:a14="http://schemas.microsoft.com/office/drawing/2010/main" w="9525">
                   <a:solidFill>
                     <a:srgbClr val="000000"/>
                   </a:solidFill>
@@ -5406,7 +5406,7 @@
             </a:ln>
             <a:extLst>
               <a:ext uri="{91240B29-F687-4f45-9708-019B960494DF}">
-                <a14:hiddenLine xmlns:a14="http://schemas.microsoft.com/office/drawing/2010/main" xmlns="" w="9525">
+                <a14:hiddenLine xmlns="" xmlns:a14="http://schemas.microsoft.com/office/drawing/2010/main" w="9525">
                   <a:solidFill>
                     <a:srgbClr val="000000"/>
                   </a:solidFill>
@@ -5440,7 +5440,7 @@
             </a:ln>
             <a:extLst>
               <a:ext uri="{91240B29-F687-4f45-9708-019B960494DF}">
-                <a14:hiddenLine xmlns:a14="http://schemas.microsoft.com/office/drawing/2010/main" xmlns="" w="9525">
+                <a14:hiddenLine xmlns="" xmlns:a14="http://schemas.microsoft.com/office/drawing/2010/main" w="9525">
                   <a:solidFill>
                     <a:srgbClr val="000000"/>
                   </a:solidFill>
@@ -5505,7 +5505,7 @@
             </a:ln>
             <a:extLst>
               <a:ext uri="{91240B29-F687-4f45-9708-019B960494DF}">
-                <a14:hiddenLine xmlns:a14="http://schemas.microsoft.com/office/drawing/2010/main" xmlns="" w="9525">
+                <a14:hiddenLine xmlns="" xmlns:a14="http://schemas.microsoft.com/office/drawing/2010/main" w="9525">
                   <a:solidFill>
                     <a:srgbClr val="000000"/>
                   </a:solidFill>
@@ -5595,7 +5595,7 @@
             </a:ln>
             <a:extLst>
               <a:ext uri="{91240B29-F687-4f45-9708-019B960494DF}">
-                <a14:hiddenLine xmlns:a14="http://schemas.microsoft.com/office/drawing/2010/main" xmlns="" w="9525">
+                <a14:hiddenLine xmlns="" xmlns:a14="http://schemas.microsoft.com/office/drawing/2010/main" w="9525">
                   <a:solidFill>
                     <a:srgbClr val="000000"/>
                   </a:solidFill>
@@ -5657,7 +5657,7 @@
             </a:ln>
             <a:extLst>
               <a:ext uri="{91240B29-F687-4f45-9708-019B960494DF}">
-                <a14:hiddenLine xmlns:a14="http://schemas.microsoft.com/office/drawing/2010/main" xmlns="" w="9525">
+                <a14:hiddenLine xmlns="" xmlns:a14="http://schemas.microsoft.com/office/drawing/2010/main" w="9525">
                   <a:solidFill>
                     <a:srgbClr val="000000"/>
                   </a:solidFill>
@@ -5747,7 +5747,7 @@
             </a:ln>
             <a:extLst>
               <a:ext uri="{91240B29-F687-4f45-9708-019B960494DF}">
-                <a14:hiddenLine xmlns:a14="http://schemas.microsoft.com/office/drawing/2010/main" xmlns="" w="9525">
+                <a14:hiddenLine xmlns="" xmlns:a14="http://schemas.microsoft.com/office/drawing/2010/main" w="9525">
                   <a:solidFill>
                     <a:srgbClr val="000000"/>
                   </a:solidFill>
@@ -5837,7 +5837,7 @@
             </a:ln>
             <a:extLst>
               <a:ext uri="{91240B29-F687-4f45-9708-019B960494DF}">
-                <a14:hiddenLine xmlns:a14="http://schemas.microsoft.com/office/drawing/2010/main" xmlns="" w="9525">
+                <a14:hiddenLine xmlns="" xmlns:a14="http://schemas.microsoft.com/office/drawing/2010/main" w="9525">
                   <a:solidFill>
                     <a:srgbClr val="000000"/>
                   </a:solidFill>
@@ -5902,7 +5902,7 @@
             </a:ln>
             <a:extLst>
               <a:ext uri="{91240B29-F687-4f45-9708-019B960494DF}">
-                <a14:hiddenLine xmlns:a14="http://schemas.microsoft.com/office/drawing/2010/main" xmlns="" w="9525">
+                <a14:hiddenLine xmlns="" xmlns:a14="http://schemas.microsoft.com/office/drawing/2010/main" w="9525">
                   <a:solidFill>
                     <a:srgbClr val="000000"/>
                   </a:solidFill>
@@ -5964,7 +5964,7 @@
             </a:ln>
             <a:extLst>
               <a:ext uri="{91240B29-F687-4f45-9708-019B960494DF}">
-                <a14:hiddenLine xmlns:a14="http://schemas.microsoft.com/office/drawing/2010/main" xmlns="" w="9525">
+                <a14:hiddenLine xmlns="" xmlns:a14="http://schemas.microsoft.com/office/drawing/2010/main" w="9525">
                   <a:solidFill>
                     <a:srgbClr val="000000"/>
                   </a:solidFill>
@@ -6054,7 +6054,7 @@
             </a:ln>
             <a:extLst>
               <a:ext uri="{91240B29-F687-4f45-9708-019B960494DF}">
-                <a14:hiddenLine xmlns:a14="http://schemas.microsoft.com/office/drawing/2010/main" xmlns="" w="9525">
+                <a14:hiddenLine xmlns="" xmlns:a14="http://schemas.microsoft.com/office/drawing/2010/main" w="9525">
                   <a:solidFill>
                     <a:srgbClr val="000000"/>
                   </a:solidFill>
@@ -6144,7 +6144,7 @@
             </a:ln>
             <a:extLst>
               <a:ext uri="{91240B29-F687-4f45-9708-019B960494DF}">
-                <a14:hiddenLine xmlns:a14="http://schemas.microsoft.com/office/drawing/2010/main" xmlns="" w="9525">
+                <a14:hiddenLine xmlns="" xmlns:a14="http://schemas.microsoft.com/office/drawing/2010/main" w="9525">
                   <a:solidFill>
                     <a:srgbClr val="000000"/>
                   </a:solidFill>
@@ -6206,7 +6206,7 @@
             </a:ln>
             <a:extLst>
               <a:ext uri="{91240B29-F687-4f45-9708-019B960494DF}">
-                <a14:hiddenLine xmlns:a14="http://schemas.microsoft.com/office/drawing/2010/main" xmlns="" w="9525">
+                <a14:hiddenLine xmlns="" xmlns:a14="http://schemas.microsoft.com/office/drawing/2010/main" w="9525">
                   <a:solidFill>
                     <a:srgbClr val="000000"/>
                   </a:solidFill>
@@ -6326,7 +6326,7 @@
             </a:ln>
             <a:extLst>
               <a:ext uri="{91240B29-F687-4f45-9708-019B960494DF}">
-                <a14:hiddenLine xmlns:a14="http://schemas.microsoft.com/office/drawing/2010/main" xmlns="" w="9525">
+                <a14:hiddenLine xmlns="" xmlns:a14="http://schemas.microsoft.com/office/drawing/2010/main" w="9525">
                   <a:solidFill>
                     <a:srgbClr val="000000"/>
                   </a:solidFill>
@@ -6394,7 +6394,7 @@
             </a:ln>
             <a:extLst>
               <a:ext uri="{91240B29-F687-4f45-9708-019B960494DF}">
-                <a14:hiddenLine xmlns:a14="http://schemas.microsoft.com/office/drawing/2010/main" xmlns="" w="9525">
+                <a14:hiddenLine xmlns="" xmlns:a14="http://schemas.microsoft.com/office/drawing/2010/main" w="9525">
                   <a:solidFill>
                     <a:srgbClr val="000000"/>
                   </a:solidFill>
@@ -6484,7 +6484,7 @@
             </a:ln>
             <a:extLst>
               <a:ext uri="{91240B29-F687-4f45-9708-019B960494DF}">
-                <a14:hiddenLine xmlns:a14="http://schemas.microsoft.com/office/drawing/2010/main" xmlns="" w="9525">
+                <a14:hiddenLine xmlns="" xmlns:a14="http://schemas.microsoft.com/office/drawing/2010/main" w="9525">
                   <a:solidFill>
                     <a:srgbClr val="000000"/>
                   </a:solidFill>
@@ -6624,7 +6624,7 @@
           <a:p>
             <a:fld id="{99C194EE-FA60-F34D-86F8-966C052D377B}" type="datetime1">
               <a:rPr lang="en-US" smtClean="0"/>
-              <a:t>8/20/25</a:t>
+              <a:t>9/26/25</a:t>
             </a:fld>
             <a:endParaRPr lang="en-US"/>
           </a:p>
@@ -6891,7 +6891,7 @@
           <a:p>
             <a:fld id="{CEA70AF6-319A-5F40-9833-4B84B09CD206}" type="datetime1">
               <a:rPr lang="en-US" smtClean="0"/>
-              <a:t>8/20/25</a:t>
+              <a:t>9/26/25</a:t>
             </a:fld>
             <a:endParaRPr lang="en-US"/>
           </a:p>
@@ -7087,7 +7087,7 @@
           <a:p>
             <a:fld id="{E31E25DA-808D-D44E-B46C-CE2C1DC20748}" type="datetime1">
               <a:rPr lang="en-US" smtClean="0"/>
-              <a:t>8/20/25</a:t>
+              <a:t>9/26/25</a:t>
             </a:fld>
             <a:endParaRPr lang="en-US"/>
           </a:p>
@@ -7350,7 +7350,7 @@
           <a:p>
             <a:fld id="{A8F5BE9B-AD7A-984B-94FE-2F7F29A5BBF8}" type="datetime1">
               <a:rPr lang="en-US" smtClean="0"/>
-              <a:t>8/20/25</a:t>
+              <a:t>9/26/25</a:t>
             </a:fld>
             <a:endParaRPr lang="en-US"/>
           </a:p>
@@ -7784,7 +7784,7 @@
           <a:p>
             <a:fld id="{7E735745-726D-9046-9931-CD1599AD73F7}" type="datetime1">
               <a:rPr lang="en-US" smtClean="0"/>
-              <a:t>8/20/25</a:t>
+              <a:t>9/26/25</a:t>
             </a:fld>
             <a:endParaRPr lang="en-US"/>
           </a:p>
@@ -8330,7 +8330,7 @@
           <a:p>
             <a:fld id="{A787CF5C-AE42-BF48-A0B5-6B0B1C66B68B}" type="datetime1">
               <a:rPr lang="en-US" smtClean="0"/>
-              <a:t>8/20/25</a:t>
+              <a:t>9/26/25</a:t>
             </a:fld>
             <a:endParaRPr lang="en-US"/>
           </a:p>
@@ -9050,7 +9050,7 @@
           <a:p>
             <a:fld id="{E856B449-641C-BC41-821D-A63EBD8B29DA}" type="datetime1">
               <a:rPr lang="en-US" smtClean="0"/>
-              <a:t>8/20/25</a:t>
+              <a:t>9/26/25</a:t>
             </a:fld>
             <a:endParaRPr lang="en-US"/>
           </a:p>
@@ -9220,7 +9220,7 @@
           <a:p>
             <a:fld id="{44C15CF8-D751-264B-A1E9-AB57E56A64D6}" type="datetime1">
               <a:rPr lang="en-US" smtClean="0"/>
-              <a:t>8/20/25</a:t>
+              <a:t>9/26/25</a:t>
             </a:fld>
             <a:endParaRPr lang="en-US"/>
           </a:p>
@@ -9400,7 +9400,7 @@
           <a:p>
             <a:fld id="{380B80A9-66F6-784A-AE29-24D484B6929E}" type="datetime1">
               <a:rPr lang="en-US" smtClean="0"/>
-              <a:t>8/20/25</a:t>
+              <a:t>9/26/25</a:t>
             </a:fld>
             <a:endParaRPr lang="en-US"/>
           </a:p>
@@ -9570,7 +9570,7 @@
           <a:p>
             <a:fld id="{24D5B64A-21DB-1A49-8B83-7A247B6A00D7}" type="datetime1">
               <a:rPr lang="en-US" smtClean="0"/>
-              <a:t>8/20/25</a:t>
+              <a:t>9/26/25</a:t>
             </a:fld>
             <a:endParaRPr lang="en-US"/>
           </a:p>
@@ -9820,7 +9820,7 @@
           <a:p>
             <a:fld id="{57D5F905-A50D-4249-A0C4-91909633BBDD}" type="datetime1">
               <a:rPr lang="en-US" smtClean="0"/>
-              <a:t>8/20/25</a:t>
+              <a:t>9/26/25</a:t>
             </a:fld>
             <a:endParaRPr lang="en-US"/>
           </a:p>
@@ -10052,7 +10052,7 @@
           <a:p>
             <a:fld id="{E5EC99BB-53AF-A84C-9B6C-6C8C2DFEE567}" type="datetime1">
               <a:rPr lang="en-US" smtClean="0"/>
-              <a:t>8/20/25</a:t>
+              <a:t>9/26/25</a:t>
             </a:fld>
             <a:endParaRPr lang="en-US"/>
           </a:p>
@@ -10438,7 +10438,7 @@
           <a:p>
             <a:fld id="{6E4BCF23-BD3E-F444-8612-0E18B13F1EBE}" type="datetime1">
               <a:rPr lang="en-US" smtClean="0"/>
-              <a:t>8/20/25</a:t>
+              <a:t>9/26/25</a:t>
             </a:fld>
             <a:endParaRPr lang="en-US"/>
           </a:p>
@@ -10561,7 +10561,7 @@
           <a:p>
             <a:fld id="{22C5EB86-ACD1-CD49-B729-6BFA3C98D8C5}" type="datetime1">
               <a:rPr lang="en-US" smtClean="0"/>
-              <a:t>8/20/25</a:t>
+              <a:t>9/26/25</a:t>
             </a:fld>
             <a:endParaRPr lang="en-US"/>
           </a:p>
@@ -10656,7 +10656,7 @@
           <a:p>
             <a:fld id="{06E868A6-240C-9843-8C3B-5A9AB5369164}" type="datetime1">
               <a:rPr lang="en-US" smtClean="0"/>
-              <a:t>8/20/25</a:t>
+              <a:t>9/26/25</a:t>
             </a:fld>
             <a:endParaRPr lang="en-US"/>
           </a:p>
@@ -10905,7 +10905,7 @@
           <a:p>
             <a:fld id="{8995CC52-ECF4-5042-9C00-3AC23BCA8442}" type="datetime1">
               <a:rPr lang="en-US" smtClean="0"/>
-              <a:t>8/20/25</a:t>
+              <a:t>9/26/25</a:t>
             </a:fld>
             <a:endParaRPr lang="en-US"/>
           </a:p>
@@ -11190,7 +11190,7 @@
           <a:p>
             <a:fld id="{875A6050-3268-BA43-9E83-9F5CB0775FC6}" type="datetime1">
               <a:rPr lang="en-US" smtClean="0"/>
-              <a:t>8/20/25</a:t>
+              <a:t>9/26/25</a:t>
             </a:fld>
             <a:endParaRPr lang="en-US"/>
           </a:p>
@@ -11313,7 +11313,7 @@
           <a:noFill/>
           <a:extLst>
             <a:ext uri="{909E8E84-426E-40dd-AFC4-6F175D3DCCD1}">
-              <a14:hiddenFill xmlns:a14="http://schemas.microsoft.com/office/drawing/2010/main" xmlns="">
+              <a14:hiddenFill xmlns="" xmlns:a14="http://schemas.microsoft.com/office/drawing/2010/main">
                 <a:solidFill>
                   <a:srgbClr val="FFFFFF"/>
                 </a:solidFill>
@@ -11387,7 +11387,7 @@
               </a:ln>
               <a:extLst>
                 <a:ext uri="{91240B29-F687-4f45-9708-019B960494DF}">
-                  <a14:hiddenLine xmlns:a14="http://schemas.microsoft.com/office/drawing/2010/main" xmlns="" w="9525">
+                  <a14:hiddenLine xmlns="" xmlns:a14="http://schemas.microsoft.com/office/drawing/2010/main" w="9525">
                     <a:solidFill>
                       <a:srgbClr val="000000"/>
                     </a:solidFill>
@@ -11477,7 +11477,7 @@
               </a:ln>
               <a:extLst>
                 <a:ext uri="{91240B29-F687-4f45-9708-019B960494DF}">
-                  <a14:hiddenLine xmlns:a14="http://schemas.microsoft.com/office/drawing/2010/main" xmlns="" w="9525">
+                  <a14:hiddenLine xmlns="" xmlns:a14="http://schemas.microsoft.com/office/drawing/2010/main" w="9525">
                     <a:solidFill>
                       <a:srgbClr val="000000"/>
                     </a:solidFill>
@@ -11567,7 +11567,7 @@
               </a:ln>
               <a:extLst>
                 <a:ext uri="{91240B29-F687-4f45-9708-019B960494DF}">
-                  <a14:hiddenLine xmlns:a14="http://schemas.microsoft.com/office/drawing/2010/main" xmlns="" w="9525">
+                  <a14:hiddenLine xmlns="" xmlns:a14="http://schemas.microsoft.com/office/drawing/2010/main" w="9525">
                     <a:solidFill>
                       <a:srgbClr val="000000"/>
                     </a:solidFill>
@@ -11629,7 +11629,7 @@
               </a:ln>
               <a:extLst>
                 <a:ext uri="{91240B29-F687-4f45-9708-019B960494DF}">
-                  <a14:hiddenLine xmlns:a14="http://schemas.microsoft.com/office/drawing/2010/main" xmlns="" w="9525">
+                  <a14:hiddenLine xmlns="" xmlns:a14="http://schemas.microsoft.com/office/drawing/2010/main" w="9525">
                     <a:solidFill>
                       <a:srgbClr val="000000"/>
                     </a:solidFill>
@@ -11719,7 +11719,7 @@
               </a:ln>
               <a:extLst>
                 <a:ext uri="{91240B29-F687-4f45-9708-019B960494DF}">
-                  <a14:hiddenLine xmlns:a14="http://schemas.microsoft.com/office/drawing/2010/main" xmlns="" w="9525">
+                  <a14:hiddenLine xmlns="" xmlns:a14="http://schemas.microsoft.com/office/drawing/2010/main" w="9525">
                     <a:solidFill>
                       <a:srgbClr val="000000"/>
                     </a:solidFill>
@@ -11781,7 +11781,7 @@
               </a:ln>
               <a:extLst>
                 <a:ext uri="{91240B29-F687-4f45-9708-019B960494DF}">
-                  <a14:hiddenLine xmlns:a14="http://schemas.microsoft.com/office/drawing/2010/main" xmlns="" w="9525">
+                  <a14:hiddenLine xmlns="" xmlns:a14="http://schemas.microsoft.com/office/drawing/2010/main" w="9525">
                     <a:solidFill>
                       <a:srgbClr val="000000"/>
                     </a:solidFill>
@@ -11843,7 +11843,7 @@
               </a:ln>
               <a:extLst>
                 <a:ext uri="{91240B29-F687-4f45-9708-019B960494DF}">
-                  <a14:hiddenLine xmlns:a14="http://schemas.microsoft.com/office/drawing/2010/main" xmlns="" w="9525">
+                  <a14:hiddenLine xmlns="" xmlns:a14="http://schemas.microsoft.com/office/drawing/2010/main" w="9525">
                     <a:solidFill>
                       <a:srgbClr val="000000"/>
                     </a:solidFill>
@@ -11933,7 +11933,7 @@
               </a:ln>
               <a:extLst>
                 <a:ext uri="{91240B29-F687-4f45-9708-019B960494DF}">
-                  <a14:hiddenLine xmlns:a14="http://schemas.microsoft.com/office/drawing/2010/main" xmlns="" w="9525">
+                  <a14:hiddenLine xmlns="" xmlns:a14="http://schemas.microsoft.com/office/drawing/2010/main" w="9525">
                     <a:solidFill>
                       <a:srgbClr val="000000"/>
                     </a:solidFill>
@@ -12023,7 +12023,7 @@
               </a:ln>
               <a:extLst>
                 <a:ext uri="{91240B29-F687-4f45-9708-019B960494DF}">
-                  <a14:hiddenLine xmlns:a14="http://schemas.microsoft.com/office/drawing/2010/main" xmlns="" w="9525">
+                  <a14:hiddenLine xmlns="" xmlns:a14="http://schemas.microsoft.com/office/drawing/2010/main" w="9525">
                     <a:solidFill>
                       <a:srgbClr val="000000"/>
                     </a:solidFill>
@@ -12085,7 +12085,7 @@
               </a:ln>
               <a:extLst>
                 <a:ext uri="{91240B29-F687-4f45-9708-019B960494DF}">
-                  <a14:hiddenLine xmlns:a14="http://schemas.microsoft.com/office/drawing/2010/main" xmlns="" w="9525">
+                  <a14:hiddenLine xmlns="" xmlns:a14="http://schemas.microsoft.com/office/drawing/2010/main" w="9525">
                     <a:solidFill>
                       <a:srgbClr val="000000"/>
                     </a:solidFill>
@@ -12195,7 +12195,7 @@
               </a:ln>
               <a:extLst>
                 <a:ext uri="{91240B29-F687-4f45-9708-019B960494DF}">
-                  <a14:hiddenLine xmlns:a14="http://schemas.microsoft.com/office/drawing/2010/main" xmlns="" w="9525">
+                  <a14:hiddenLine xmlns="" xmlns:a14="http://schemas.microsoft.com/office/drawing/2010/main" w="9525">
                     <a:solidFill>
                       <a:srgbClr val="000000"/>
                     </a:solidFill>
@@ -12279,7 +12279,7 @@
               </a:ln>
               <a:extLst>
                 <a:ext uri="{91240B29-F687-4f45-9708-019B960494DF}">
-                  <a14:hiddenLine xmlns:a14="http://schemas.microsoft.com/office/drawing/2010/main" xmlns="" w="9525">
+                  <a14:hiddenLine xmlns="" xmlns:a14="http://schemas.microsoft.com/office/drawing/2010/main" w="9525">
                     <a:solidFill>
                       <a:srgbClr val="000000"/>
                     </a:solidFill>
@@ -12341,7 +12341,7 @@
               </a:ln>
               <a:extLst>
                 <a:ext uri="{91240B29-F687-4f45-9708-019B960494DF}">
-                  <a14:hiddenLine xmlns:a14="http://schemas.microsoft.com/office/drawing/2010/main" xmlns="" w="9525">
+                  <a14:hiddenLine xmlns="" xmlns:a14="http://schemas.microsoft.com/office/drawing/2010/main" w="9525">
                     <a:solidFill>
                       <a:srgbClr val="000000"/>
                     </a:solidFill>
@@ -12403,7 +12403,7 @@
               </a:ln>
               <a:extLst>
                 <a:ext uri="{91240B29-F687-4f45-9708-019B960494DF}">
-                  <a14:hiddenLine xmlns:a14="http://schemas.microsoft.com/office/drawing/2010/main" xmlns="" w="9525">
+                  <a14:hiddenLine xmlns="" xmlns:a14="http://schemas.microsoft.com/office/drawing/2010/main" w="9525">
                     <a:solidFill>
                       <a:srgbClr val="000000"/>
                     </a:solidFill>
@@ -12493,7 +12493,7 @@
               </a:ln>
               <a:extLst>
                 <a:ext uri="{91240B29-F687-4f45-9708-019B960494DF}">
-                  <a14:hiddenLine xmlns:a14="http://schemas.microsoft.com/office/drawing/2010/main" xmlns="" w="9525">
+                  <a14:hiddenLine xmlns="" xmlns:a14="http://schemas.microsoft.com/office/drawing/2010/main" w="9525">
                     <a:solidFill>
                       <a:srgbClr val="000000"/>
                     </a:solidFill>
@@ -12527,7 +12527,7 @@
               </a:ln>
               <a:extLst>
                 <a:ext uri="{91240B29-F687-4f45-9708-019B960494DF}">
-                  <a14:hiddenLine xmlns:a14="http://schemas.microsoft.com/office/drawing/2010/main" xmlns="" w="9525">
+                  <a14:hiddenLine xmlns="" xmlns:a14="http://schemas.microsoft.com/office/drawing/2010/main" w="9525">
                     <a:solidFill>
                       <a:srgbClr val="000000"/>
                     </a:solidFill>
@@ -12592,7 +12592,7 @@
               </a:ln>
               <a:extLst>
                 <a:ext uri="{91240B29-F687-4f45-9708-019B960494DF}">
-                  <a14:hiddenLine xmlns:a14="http://schemas.microsoft.com/office/drawing/2010/main" xmlns="" w="9525">
+                  <a14:hiddenLine xmlns="" xmlns:a14="http://schemas.microsoft.com/office/drawing/2010/main" w="9525">
                     <a:solidFill>
                       <a:srgbClr val="000000"/>
                     </a:solidFill>
@@ -12682,7 +12682,7 @@
               </a:ln>
               <a:extLst>
                 <a:ext uri="{91240B29-F687-4f45-9708-019B960494DF}">
-                  <a14:hiddenLine xmlns:a14="http://schemas.microsoft.com/office/drawing/2010/main" xmlns="" w="9525">
+                  <a14:hiddenLine xmlns="" xmlns:a14="http://schemas.microsoft.com/office/drawing/2010/main" w="9525">
                     <a:solidFill>
                       <a:srgbClr val="000000"/>
                     </a:solidFill>
@@ -12744,7 +12744,7 @@
               </a:ln>
               <a:extLst>
                 <a:ext uri="{91240B29-F687-4f45-9708-019B960494DF}">
-                  <a14:hiddenLine xmlns:a14="http://schemas.microsoft.com/office/drawing/2010/main" xmlns="" w="9525">
+                  <a14:hiddenLine xmlns="" xmlns:a14="http://schemas.microsoft.com/office/drawing/2010/main" w="9525">
                     <a:solidFill>
                       <a:srgbClr val="000000"/>
                     </a:solidFill>
@@ -12834,7 +12834,7 @@
               </a:ln>
               <a:extLst>
                 <a:ext uri="{91240B29-F687-4f45-9708-019B960494DF}">
-                  <a14:hiddenLine xmlns:a14="http://schemas.microsoft.com/office/drawing/2010/main" xmlns="" w="9525">
+                  <a14:hiddenLine xmlns="" xmlns:a14="http://schemas.microsoft.com/office/drawing/2010/main" w="9525">
                     <a:solidFill>
                       <a:srgbClr val="000000"/>
                     </a:solidFill>
@@ -12899,7 +12899,7 @@
               </a:ln>
               <a:extLst>
                 <a:ext uri="{91240B29-F687-4f45-9708-019B960494DF}">
-                  <a14:hiddenLine xmlns:a14="http://schemas.microsoft.com/office/drawing/2010/main" xmlns="" w="9525">
+                  <a14:hiddenLine xmlns="" xmlns:a14="http://schemas.microsoft.com/office/drawing/2010/main" w="9525">
                     <a:solidFill>
                       <a:srgbClr val="000000"/>
                     </a:solidFill>
@@ -12961,7 +12961,7 @@
               </a:ln>
               <a:extLst>
                 <a:ext uri="{91240B29-F687-4f45-9708-019B960494DF}">
-                  <a14:hiddenLine xmlns:a14="http://schemas.microsoft.com/office/drawing/2010/main" xmlns="" w="9525">
+                  <a14:hiddenLine xmlns="" xmlns:a14="http://schemas.microsoft.com/office/drawing/2010/main" w="9525">
                     <a:solidFill>
                       <a:srgbClr val="000000"/>
                     </a:solidFill>
@@ -13051,7 +13051,7 @@
               </a:ln>
               <a:extLst>
                 <a:ext uri="{91240B29-F687-4f45-9708-019B960494DF}">
-                  <a14:hiddenLine xmlns:a14="http://schemas.microsoft.com/office/drawing/2010/main" xmlns="" w="9525">
+                  <a14:hiddenLine xmlns="" xmlns:a14="http://schemas.microsoft.com/office/drawing/2010/main" w="9525">
                     <a:solidFill>
                       <a:srgbClr val="000000"/>
                     </a:solidFill>
@@ -13141,7 +13141,7 @@
               </a:ln>
               <a:extLst>
                 <a:ext uri="{91240B29-F687-4f45-9708-019B960494DF}">
-                  <a14:hiddenLine xmlns:a14="http://schemas.microsoft.com/office/drawing/2010/main" xmlns="" w="9525">
+                  <a14:hiddenLine xmlns="" xmlns:a14="http://schemas.microsoft.com/office/drawing/2010/main" w="9525">
                     <a:solidFill>
                       <a:srgbClr val="000000"/>
                     </a:solidFill>
@@ -13206,7 +13206,7 @@
               </a:ln>
               <a:extLst>
                 <a:ext uri="{91240B29-F687-4f45-9708-019B960494DF}">
-                  <a14:hiddenLine xmlns:a14="http://schemas.microsoft.com/office/drawing/2010/main" xmlns="" w="9525">
+                  <a14:hiddenLine xmlns="" xmlns:a14="http://schemas.microsoft.com/office/drawing/2010/main" w="9525">
                     <a:solidFill>
                       <a:srgbClr val="000000"/>
                     </a:solidFill>
@@ -13326,7 +13326,7 @@
               </a:ln>
               <a:extLst>
                 <a:ext uri="{91240B29-F687-4f45-9708-019B960494DF}">
-                  <a14:hiddenLine xmlns:a14="http://schemas.microsoft.com/office/drawing/2010/main" xmlns="" w="9525">
+                  <a14:hiddenLine xmlns="" xmlns:a14="http://schemas.microsoft.com/office/drawing/2010/main" w="9525">
                     <a:solidFill>
                       <a:srgbClr val="000000"/>
                     </a:solidFill>
@@ -13407,7 +13407,7 @@
               </a:ln>
               <a:extLst>
                 <a:ext uri="{91240B29-F687-4f45-9708-019B960494DF}">
-                  <a14:hiddenLine xmlns:a14="http://schemas.microsoft.com/office/drawing/2010/main" xmlns="" w="9525">
+                  <a14:hiddenLine xmlns="" xmlns:a14="http://schemas.microsoft.com/office/drawing/2010/main" w="9525">
                     <a:solidFill>
                       <a:srgbClr val="000000"/>
                     </a:solidFill>
@@ -13522,7 +13522,7 @@
               </a:ln>
               <a:extLst>
                 <a:ext uri="{91240B29-F687-4f45-9708-019B960494DF}">
-                  <a14:hiddenLine xmlns:a14="http://schemas.microsoft.com/office/drawing/2010/main" xmlns="" w="9525">
+                  <a14:hiddenLine xmlns="" xmlns:a14="http://schemas.microsoft.com/office/drawing/2010/main" w="9525">
                     <a:solidFill>
                       <a:srgbClr val="000000"/>
                     </a:solidFill>
@@ -13612,7 +13612,7 @@
               </a:ln>
               <a:extLst>
                 <a:ext uri="{91240B29-F687-4f45-9708-019B960494DF}">
-                  <a14:hiddenLine xmlns:a14="http://schemas.microsoft.com/office/drawing/2010/main" xmlns="" w="9525">
+                  <a14:hiddenLine xmlns="" xmlns:a14="http://schemas.microsoft.com/office/drawing/2010/main" w="9525">
                     <a:solidFill>
                       <a:srgbClr val="000000"/>
                     </a:solidFill>
@@ -13677,7 +13677,7 @@
               </a:ln>
               <a:extLst>
                 <a:ext uri="{91240B29-F687-4f45-9708-019B960494DF}">
-                  <a14:hiddenLine xmlns:a14="http://schemas.microsoft.com/office/drawing/2010/main" xmlns="" w="9525">
+                  <a14:hiddenLine xmlns="" xmlns:a14="http://schemas.microsoft.com/office/drawing/2010/main" w="9525">
                     <a:solidFill>
                       <a:srgbClr val="000000"/>
                     </a:solidFill>
@@ -13767,7 +13767,7 @@
               </a:ln>
               <a:extLst>
                 <a:ext uri="{91240B29-F687-4f45-9708-019B960494DF}">
-                  <a14:hiddenLine xmlns:a14="http://schemas.microsoft.com/office/drawing/2010/main" xmlns="" w="9525">
+                  <a14:hiddenLine xmlns="" xmlns:a14="http://schemas.microsoft.com/office/drawing/2010/main" w="9525">
                     <a:solidFill>
                       <a:srgbClr val="000000"/>
                     </a:solidFill>
@@ -13835,7 +13835,7 @@
               </a:ln>
               <a:extLst>
                 <a:ext uri="{91240B29-F687-4f45-9708-019B960494DF}">
-                  <a14:hiddenLine xmlns:a14="http://schemas.microsoft.com/office/drawing/2010/main" xmlns="" w="9525">
+                  <a14:hiddenLine xmlns="" xmlns:a14="http://schemas.microsoft.com/office/drawing/2010/main" w="9525">
                     <a:solidFill>
                       <a:srgbClr val="000000"/>
                     </a:solidFill>
@@ -13925,7 +13925,7 @@
               </a:ln>
               <a:extLst>
                 <a:ext uri="{91240B29-F687-4f45-9708-019B960494DF}">
-                  <a14:hiddenLine xmlns:a14="http://schemas.microsoft.com/office/drawing/2010/main" xmlns="" w="9525">
+                  <a14:hiddenLine xmlns="" xmlns:a14="http://schemas.microsoft.com/office/drawing/2010/main" w="9525">
                     <a:solidFill>
                       <a:srgbClr val="000000"/>
                     </a:solidFill>
@@ -13993,7 +13993,7 @@
               </a:ln>
               <a:extLst>
                 <a:ext uri="{91240B29-F687-4f45-9708-019B960494DF}">
-                  <a14:hiddenLine xmlns:a14="http://schemas.microsoft.com/office/drawing/2010/main" xmlns="" w="9525">
+                  <a14:hiddenLine xmlns="" xmlns:a14="http://schemas.microsoft.com/office/drawing/2010/main" w="9525">
                     <a:solidFill>
                       <a:srgbClr val="000000"/>
                     </a:solidFill>
@@ -14083,7 +14083,7 @@
               </a:ln>
               <a:extLst>
                 <a:ext uri="{91240B29-F687-4f45-9708-019B960494DF}">
-                  <a14:hiddenLine xmlns:a14="http://schemas.microsoft.com/office/drawing/2010/main" xmlns="" w="9525">
+                  <a14:hiddenLine xmlns="" xmlns:a14="http://schemas.microsoft.com/office/drawing/2010/main" w="9525">
                     <a:solidFill>
                       <a:srgbClr val="000000"/>
                     </a:solidFill>
@@ -14117,7 +14117,7 @@
               </a:ln>
               <a:extLst>
                 <a:ext uri="{91240B29-F687-4f45-9708-019B960494DF}">
-                  <a14:hiddenLine xmlns:a14="http://schemas.microsoft.com/office/drawing/2010/main" xmlns="" w="9525">
+                  <a14:hiddenLine xmlns="" xmlns:a14="http://schemas.microsoft.com/office/drawing/2010/main" w="9525">
                     <a:solidFill>
                       <a:srgbClr val="000000"/>
                     </a:solidFill>
@@ -14257,7 +14257,7 @@
           <a:p>
             <a:fld id="{E6C8EED1-372D-8A44-BBA9-4B4EE45DC7FD}" type="datetime1">
               <a:rPr lang="en-US" smtClean="0"/>
-              <a:t>8/20/25</a:t>
+              <a:t>9/26/25</a:t>
             </a:fld>
             <a:endParaRPr lang="en-US"/>
           </a:p>
@@ -14736,7 +14736,7 @@
             <a:pPr algn="ctr"/>
             <a:r>
               <a:rPr lang="en-US" dirty="0"/>
-              <a:t>Discrete Mathematics and Theory 2</a:t>
+              <a:t>Data Structures and Algorithms 2</a:t>
             </a:r>
             <a:br>
               <a:rPr lang="en-US" dirty="0"/>
@@ -14932,8 +14932,8 @@
           </a:p>
         </p:txBody>
       </p:sp>
-      <mc:AlternateContent xmlns:mc="http://schemas.openxmlformats.org/markup-compatibility/2006">
-        <mc:Choice xmlns:a14="http://schemas.microsoft.com/office/drawing/2010/main" Requires="a14">
+      <mc:AlternateContent xmlns:mc="http://schemas.openxmlformats.org/markup-compatibility/2006" xmlns:a14="http://schemas.microsoft.com/office/drawing/2010/main">
+        <mc:Choice Requires="a14">
           <p:sp>
             <p:nvSpPr>
               <p:cNvPr id="2" name="TextBox 1">
@@ -14969,6 +14969,7 @@
               </a:bodyPr>
               <a:lstStyle/>
               <a:p>
+                <a:pPr/>
                 <a14:m>
                   <m:oMathPara xmlns:m="http://schemas.openxmlformats.org/officeDocument/2006/math">
                     <m:oMathParaPr>
@@ -15197,7 +15198,7 @@
             </p:txBody>
           </p:sp>
         </mc:Choice>
-        <mc:Fallback>
+        <mc:Fallback xmlns="">
           <p:sp>
             <p:nvSpPr>
               <p:cNvPr id="2" name="TextBox 1">
@@ -16126,8 +16127,8 @@
           </a:p>
         </p:txBody>
       </p:sp>
-      <mc:AlternateContent xmlns:mc="http://schemas.openxmlformats.org/markup-compatibility/2006">
-        <mc:Choice xmlns:a14="http://schemas.microsoft.com/office/drawing/2010/main" Requires="a14">
+      <mc:AlternateContent xmlns:mc="http://schemas.openxmlformats.org/markup-compatibility/2006" xmlns:a14="http://schemas.microsoft.com/office/drawing/2010/main">
+        <mc:Choice Requires="a14">
           <p:sp>
             <p:nvSpPr>
               <p:cNvPr id="2" name="TextBox 1">
@@ -16163,6 +16164,7 @@
               </a:bodyPr>
               <a:lstStyle/>
               <a:p>
+                <a:pPr/>
                 <a14:m>
                   <m:oMathPara xmlns:m="http://schemas.openxmlformats.org/officeDocument/2006/math">
                     <m:oMathParaPr>
@@ -16391,7 +16393,7 @@
             </p:txBody>
           </p:sp>
         </mc:Choice>
-        <mc:Fallback>
+        <mc:Fallback xmlns="">
           <p:sp>
             <p:nvSpPr>
               <p:cNvPr id="2" name="TextBox 1">
@@ -17145,8 +17147,8 @@
           </p:txBody>
         </p:sp>
       </p:grpSp>
-      <mc:AlternateContent xmlns:mc="http://schemas.openxmlformats.org/markup-compatibility/2006">
-        <mc:Choice xmlns:a14="http://schemas.microsoft.com/office/drawing/2010/main" Requires="a14">
+      <mc:AlternateContent xmlns:mc="http://schemas.openxmlformats.org/markup-compatibility/2006" xmlns:a14="http://schemas.microsoft.com/office/drawing/2010/main">
+        <mc:Choice Requires="a14">
           <p:sp>
             <p:nvSpPr>
               <p:cNvPr id="12" name="TextBox 11">
@@ -17182,6 +17184,7 @@
               </a:bodyPr>
               <a:lstStyle/>
               <a:p>
+                <a:pPr/>
                 <a14:m>
                   <m:oMathPara xmlns:m="http://schemas.openxmlformats.org/officeDocument/2006/math">
                     <m:oMathParaPr>
@@ -17413,7 +17416,7 @@
             </p:txBody>
           </p:sp>
         </mc:Choice>
-        <mc:Fallback>
+        <mc:Fallback xmlns="">
           <p:sp>
             <p:nvSpPr>
               <p:cNvPr id="12" name="TextBox 11">
@@ -17642,8 +17645,8 @@
           </a:p>
         </p:txBody>
       </p:sp>
-      <mc:AlternateContent xmlns:mc="http://schemas.openxmlformats.org/markup-compatibility/2006">
-        <mc:Choice xmlns:a14="http://schemas.microsoft.com/office/drawing/2010/main" Requires="a14">
+      <mc:AlternateContent xmlns:mc="http://schemas.openxmlformats.org/markup-compatibility/2006" xmlns:a14="http://schemas.microsoft.com/office/drawing/2010/main">
+        <mc:Choice Requires="a14">
           <p:sp>
             <p:nvSpPr>
               <p:cNvPr id="2" name="TextBox 1">
@@ -17679,6 +17682,7 @@
               </a:bodyPr>
               <a:lstStyle/>
               <a:p>
+                <a:pPr/>
                 <a14:m>
                   <m:oMathPara xmlns:m="http://schemas.openxmlformats.org/officeDocument/2006/math">
                     <m:oMathParaPr>
@@ -17907,7 +17911,7 @@
             </p:txBody>
           </p:sp>
         </mc:Choice>
-        <mc:Fallback>
+        <mc:Fallback xmlns="">
           <p:sp>
             <p:nvSpPr>
               <p:cNvPr id="2" name="TextBox 1">
@@ -18573,8 +18577,8 @@
           </p:txBody>
         </p:sp>
       </p:grpSp>
-      <mc:AlternateContent xmlns:mc="http://schemas.openxmlformats.org/markup-compatibility/2006">
-        <mc:Choice xmlns:a14="http://schemas.microsoft.com/office/drawing/2010/main" Requires="a14">
+      <mc:AlternateContent xmlns:mc="http://schemas.openxmlformats.org/markup-compatibility/2006" xmlns:a14="http://schemas.microsoft.com/office/drawing/2010/main">
+        <mc:Choice Requires="a14">
           <p:sp>
             <p:nvSpPr>
               <p:cNvPr id="12" name="TextBox 11">
@@ -18610,6 +18614,7 @@
               </a:bodyPr>
               <a:lstStyle/>
               <a:p>
+                <a:pPr/>
                 <a14:m>
                   <m:oMathPara xmlns:m="http://schemas.openxmlformats.org/officeDocument/2006/math">
                     <m:oMathParaPr>
@@ -18823,7 +18828,7 @@
             </p:txBody>
           </p:sp>
         </mc:Choice>
-        <mc:Fallback>
+        <mc:Fallback xmlns="">
           <p:sp>
             <p:nvSpPr>
               <p:cNvPr id="12" name="TextBox 11">
@@ -18875,8 +18880,8 @@
           </p:sp>
         </mc:Fallback>
       </mc:AlternateContent>
-      <mc:AlternateContent xmlns:mc="http://schemas.openxmlformats.org/markup-compatibility/2006">
-        <mc:Choice xmlns:a14="http://schemas.microsoft.com/office/drawing/2010/main" Requires="a14">
+      <mc:AlternateContent xmlns:mc="http://schemas.openxmlformats.org/markup-compatibility/2006" xmlns:a14="http://schemas.microsoft.com/office/drawing/2010/main">
+        <mc:Choice Requires="a14">
           <p:sp>
             <p:nvSpPr>
               <p:cNvPr id="13" name="TextBox 12">
@@ -18912,6 +18917,7 @@
               </a:bodyPr>
               <a:lstStyle/>
               <a:p>
+                <a:pPr/>
                 <a14:m>
                   <m:oMathPara xmlns:m="http://schemas.openxmlformats.org/officeDocument/2006/math">
                     <m:oMathParaPr>
@@ -19125,7 +19131,7 @@
             </p:txBody>
           </p:sp>
         </mc:Choice>
-        <mc:Fallback>
+        <mc:Fallback xmlns="">
           <p:sp>
             <p:nvSpPr>
               <p:cNvPr id="13" name="TextBox 12">
@@ -19273,8 +19279,8 @@
           </a:p>
         </p:txBody>
       </p:sp>
-      <mc:AlternateContent xmlns:mc="http://schemas.openxmlformats.org/markup-compatibility/2006">
-        <mc:Choice xmlns:a14="http://schemas.microsoft.com/office/drawing/2010/main" Requires="a14">
+      <mc:AlternateContent xmlns:mc="http://schemas.openxmlformats.org/markup-compatibility/2006" xmlns:a14="http://schemas.microsoft.com/office/drawing/2010/main">
+        <mc:Choice Requires="a14">
           <p:sp>
             <p:nvSpPr>
               <p:cNvPr id="1384" name="Google Shape;1384;p28">
@@ -19500,7 +19506,7 @@
             </p:txBody>
           </p:sp>
         </mc:Choice>
-        <mc:Fallback>
+        <mc:Fallback xmlns="">
           <p:sp>
             <p:nvSpPr>
               <p:cNvPr id="1384" name="Google Shape;1384;p28">
@@ -19552,8 +19558,8 @@
           </p:sp>
         </mc:Fallback>
       </mc:AlternateContent>
-      <mc:AlternateContent xmlns:mc="http://schemas.openxmlformats.org/markup-compatibility/2006">
-        <mc:Choice xmlns:a14="http://schemas.microsoft.com/office/drawing/2010/main" Requires="a14">
+      <mc:AlternateContent xmlns:mc="http://schemas.openxmlformats.org/markup-compatibility/2006" xmlns:a14="http://schemas.microsoft.com/office/drawing/2010/main">
+        <mc:Choice Requires="a14">
           <p:sp>
             <p:nvSpPr>
               <p:cNvPr id="2" name="TextBox 1">
@@ -19591,6 +19597,7 @@
               </a:bodyPr>
               <a:lstStyle/>
               <a:p>
+                <a:pPr/>
                 <a14:m>
                   <m:oMathPara xmlns:m="http://schemas.openxmlformats.org/officeDocument/2006/math">
                     <m:oMathParaPr>
@@ -19600,7 +19607,7 @@
                       <m:sSup>
                         <m:sSupPr>
                           <m:ctrlPr>
-                            <a:rPr lang="en-US" sz="2800" smtClean="0">
+                            <a:rPr lang="en-US" sz="2800" i="1" smtClean="0">
                               <a:ln w="0"/>
                               <a:solidFill>
                                 <a:schemeClr val="accent1"/>
@@ -19661,7 +19668,7 @@
                       <m:d>
                         <m:dPr>
                           <m:ctrlPr>
-                            <a:rPr lang="en-US" sz="2800" smtClean="0">
+                            <a:rPr lang="en-US" sz="2800" i="1" smtClean="0">
                               <a:solidFill>
                                 <a:schemeClr val="bg1"/>
                               </a:solidFill>
@@ -19704,7 +19711,7 @@
                       <m:sSup>
                         <m:sSupPr>
                           <m:ctrlPr>
-                            <a:rPr lang="en-US" sz="2800" smtClean="0">
+                            <a:rPr lang="en-US" sz="2800" i="1" smtClean="0">
                               <a:solidFill>
                                 <a:schemeClr val="bg1"/>
                               </a:solidFill>
@@ -19727,7 +19734,7 @@
                           <m:f>
                             <m:fPr>
                               <m:ctrlPr>
-                                <a:rPr lang="en-US" sz="2800" smtClean="0">
+                                <a:rPr lang="en-US" sz="2800" i="1" smtClean="0">
                                   <a:solidFill>
                                     <a:schemeClr val="bg1"/>
                                   </a:solidFill>
@@ -19766,7 +19773,7 @@
                       <m:d>
                         <m:dPr>
                           <m:ctrlPr>
-                            <a:rPr lang="en-US" sz="2800" smtClean="0">
+                            <a:rPr lang="en-US" sz="2800" i="1" smtClean="0">
                               <a:solidFill>
                                 <a:schemeClr val="bg1"/>
                               </a:solidFill>
@@ -19778,7 +19785,7 @@
                           <m:d>
                             <m:dPr>
                               <m:ctrlPr>
-                                <a:rPr lang="en-US" sz="2800" smtClean="0">
+                                <a:rPr lang="en-US" sz="2800" i="1" smtClean="0">
                                   <a:solidFill>
                                     <a:schemeClr val="accent3"/>
                                   </a:solidFill>
@@ -19842,7 +19849,7 @@
                           <m:d>
                             <m:dPr>
                               <m:ctrlPr>
-                                <a:rPr lang="en-US" sz="2800">
+                                <a:rPr lang="en-US" sz="2800" i="1">
                                   <a:solidFill>
                                     <a:schemeClr val="accent3"/>
                                   </a:solidFill>
@@ -20004,7 +20011,7 @@
             </p:txBody>
           </p:sp>
         </mc:Choice>
-        <mc:Fallback>
+        <mc:Fallback xmlns="">
           <p:sp>
             <p:nvSpPr>
               <p:cNvPr id="2" name="TextBox 1">
@@ -20707,8 +20714,8 @@
           </a:p>
         </p:txBody>
       </p:sp>
-      <mc:AlternateContent xmlns:mc="http://schemas.openxmlformats.org/markup-compatibility/2006">
-        <mc:Choice xmlns:a14="http://schemas.microsoft.com/office/drawing/2010/main" Requires="a14">
+      <mc:AlternateContent xmlns:mc="http://schemas.openxmlformats.org/markup-compatibility/2006" xmlns:a14="http://schemas.microsoft.com/office/drawing/2010/main">
+        <mc:Choice Requires="a14">
           <p:sp>
             <p:nvSpPr>
               <p:cNvPr id="16" name="TextBox 15">
@@ -20859,7 +20866,6 @@
                 <a:endParaRPr lang="en-US" dirty="0"/>
               </a:p>
               <a:p>
-                <a:pPr/>
                 <a14:m>
                   <m:oMath xmlns:m="http://schemas.openxmlformats.org/officeDocument/2006/math">
                     <m:r>
@@ -20916,11 +20922,9 @@
                 <a:endParaRPr lang="en-US" dirty="0"/>
               </a:p>
               <a:p>
-                <a:pPr/>
                 <a:endParaRPr lang="en-US" dirty="0"/>
               </a:p>
               <a:p>
-                <a:pPr/>
                 <a:r>
                   <a:rPr lang="en-US" b="1" dirty="0"/>
                   <a:t>Case 1: </a:t>
@@ -20992,7 +20996,7 @@
             </p:txBody>
           </p:sp>
         </mc:Choice>
-        <mc:Fallback>
+        <mc:Fallback xmlns="">
           <p:sp>
             <p:nvSpPr>
               <p:cNvPr id="16" name="TextBox 15">
@@ -25534,8 +25538,8 @@
           </a:p>
         </p:txBody>
       </p:sp>
-      <mc:AlternateContent xmlns:mc="http://schemas.openxmlformats.org/markup-compatibility/2006">
-        <mc:Choice xmlns:a14="http://schemas.microsoft.com/office/drawing/2010/main" Requires="a14">
+      <mc:AlternateContent xmlns:mc="http://schemas.openxmlformats.org/markup-compatibility/2006" xmlns:a14="http://schemas.microsoft.com/office/drawing/2010/main">
+        <mc:Choice Requires="a14">
           <p:sp>
             <p:nvSpPr>
               <p:cNvPr id="24" name="Google Shape;1391;p28">
@@ -25699,7 +25703,7 @@
             </p:txBody>
           </p:sp>
         </mc:Choice>
-        <mc:Fallback>
+        <mc:Fallback xmlns="">
           <p:sp>
             <p:nvSpPr>
               <p:cNvPr id="24" name="Google Shape;1391;p28">
@@ -27782,8 +27786,8 @@
           </a:p>
         </p:txBody>
       </p:sp>
-      <mc:AlternateContent xmlns:mc="http://schemas.openxmlformats.org/markup-compatibility/2006">
-        <mc:Choice xmlns:a14="http://schemas.microsoft.com/office/drawing/2010/main" Requires="a14">
+      <mc:AlternateContent xmlns:mc="http://schemas.openxmlformats.org/markup-compatibility/2006" xmlns:a14="http://schemas.microsoft.com/office/drawing/2010/main">
+        <mc:Choice Requires="a14">
           <p:sp>
             <p:nvSpPr>
               <p:cNvPr id="10" name="Google Shape;1391;p28">
@@ -27904,21 +27908,7 @@
                               <a:cs typeface="Calibri"/>
                               <a:sym typeface="Calibri"/>
                             </a:rPr>
-                            <m:t>(</m:t>
-                          </m:r>
-                          <m:r>
-                            <a:rPr lang="ar-AE" sz="2400" b="0" i="1" u="none" strike="noStrike" cap="none" smtClean="0">
-                              <a:solidFill>
-                                <a:schemeClr val="tx1">
-                                  <a:lumMod val="95000"/>
-                                </a:schemeClr>
-                              </a:solidFill>
-                              <a:latin typeface="Cambria Math" panose="02040503050406030204" pitchFamily="18" charset="0"/>
-                              <a:ea typeface="Calibri"/>
-                              <a:cs typeface="Calibri"/>
-                              <a:sym typeface="Calibri"/>
-                            </a:rPr>
-                            <m:t>10</m:t>
+                            <m:t>(10</m:t>
                           </m:r>
                         </m:e>
                         <m:sup>
@@ -28054,21 +28044,7 @@
                               <a:cs typeface="Calibri"/>
                               <a:sym typeface="Calibri"/>
                             </a:rPr>
-                            <m:t>1</m:t>
-                          </m:r>
-                          <m:r>
-                            <a:rPr lang="ar-AE" sz="2400" b="0" i="1" u="none" strike="noStrike" cap="none" smtClean="0">
-                              <a:solidFill>
-                                <a:schemeClr val="tx1">
-                                  <a:lumMod val="95000"/>
-                                </a:schemeClr>
-                              </a:solidFill>
-                              <a:latin typeface="Cambria Math" panose="02040503050406030204" pitchFamily="18" charset="0"/>
-                              <a:ea typeface="Calibri"/>
-                              <a:cs typeface="Calibri"/>
-                              <a:sym typeface="Calibri"/>
-                            </a:rPr>
-                            <m:t>0</m:t>
+                            <m:t>10</m:t>
                           </m:r>
                         </m:e>
                         <m:sup>
@@ -28193,7 +28169,7 @@
             </p:txBody>
           </p:sp>
         </mc:Choice>
-        <mc:Fallback>
+        <mc:Fallback xmlns="">
           <p:sp>
             <p:nvSpPr>
               <p:cNvPr id="10" name="Google Shape;1391;p28">
@@ -28865,8 +28841,8 @@
             </a:p>
           </p:txBody>
         </p:sp>
-        <mc:AlternateContent xmlns:mc="http://schemas.openxmlformats.org/markup-compatibility/2006">
-          <mc:Choice xmlns:a14="http://schemas.microsoft.com/office/drawing/2010/main" Requires="a14">
+        <mc:AlternateContent xmlns:mc="http://schemas.openxmlformats.org/markup-compatibility/2006" xmlns:a14="http://schemas.microsoft.com/office/drawing/2010/main">
+          <mc:Choice Requires="a14">
             <p:sp>
               <p:nvSpPr>
                 <p:cNvPr id="11" name="TextBox 10">
@@ -28954,7 +28930,7 @@
               </p:txBody>
             </p:sp>
           </mc:Choice>
-          <mc:Fallback>
+          <mc:Fallback xmlns="">
             <p:sp>
               <p:nvSpPr>
                 <p:cNvPr id="11" name="TextBox 10">
@@ -29150,8 +29126,8 @@
             </a:p>
           </p:txBody>
         </p:sp>
-        <mc:AlternateContent xmlns:mc="http://schemas.openxmlformats.org/markup-compatibility/2006">
-          <mc:Choice xmlns:a14="http://schemas.microsoft.com/office/drawing/2010/main" Requires="a14">
+        <mc:AlternateContent xmlns:mc="http://schemas.openxmlformats.org/markup-compatibility/2006" xmlns:a14="http://schemas.microsoft.com/office/drawing/2010/main">
+          <mc:Choice Requires="a14">
             <p:sp>
               <p:nvSpPr>
                 <p:cNvPr id="22" name="TextBox 21">
@@ -29239,7 +29215,7 @@
               </p:txBody>
             </p:sp>
           </mc:Choice>
-          <mc:Fallback>
+          <mc:Fallback xmlns="">
             <p:sp>
               <p:nvSpPr>
                 <p:cNvPr id="22" name="TextBox 21">
@@ -30233,8 +30209,8 @@
             </a:p>
           </p:txBody>
         </p:sp>
-        <mc:AlternateContent xmlns:mc="http://schemas.openxmlformats.org/markup-compatibility/2006">
-          <mc:Choice xmlns:a14="http://schemas.microsoft.com/office/drawing/2010/main" Requires="a14">
+        <mc:AlternateContent xmlns:mc="http://schemas.openxmlformats.org/markup-compatibility/2006" xmlns:a14="http://schemas.microsoft.com/office/drawing/2010/main">
+          <mc:Choice Requires="a14">
             <p:sp>
               <p:nvSpPr>
                 <p:cNvPr id="11" name="TextBox 10">
@@ -30322,7 +30298,7 @@
               </p:txBody>
             </p:sp>
           </mc:Choice>
-          <mc:Fallback>
+          <mc:Fallback xmlns="">
             <p:sp>
               <p:nvSpPr>
                 <p:cNvPr id="11" name="TextBox 10">
@@ -30518,8 +30494,8 @@
             </a:p>
           </p:txBody>
         </p:sp>
-        <mc:AlternateContent xmlns:mc="http://schemas.openxmlformats.org/markup-compatibility/2006">
-          <mc:Choice xmlns:a14="http://schemas.microsoft.com/office/drawing/2010/main" Requires="a14">
+        <mc:AlternateContent xmlns:mc="http://schemas.openxmlformats.org/markup-compatibility/2006" xmlns:a14="http://schemas.microsoft.com/office/drawing/2010/main">
+          <mc:Choice Requires="a14">
             <p:sp>
               <p:nvSpPr>
                 <p:cNvPr id="22" name="TextBox 21">
@@ -30607,7 +30583,7 @@
               </p:txBody>
             </p:sp>
           </mc:Choice>
-          <mc:Fallback>
+          <mc:Fallback xmlns="">
             <p:sp>
               <p:nvSpPr>
                 <p:cNvPr id="22" name="TextBox 21">
@@ -30859,8 +30835,8 @@
             </a:p>
           </p:txBody>
         </p:sp>
-        <mc:AlternateContent xmlns:mc="http://schemas.openxmlformats.org/markup-compatibility/2006">
-          <mc:Choice xmlns:a14="http://schemas.microsoft.com/office/drawing/2010/main" Requires="a14">
+        <mc:AlternateContent xmlns:mc="http://schemas.openxmlformats.org/markup-compatibility/2006" xmlns:a14="http://schemas.microsoft.com/office/drawing/2010/main">
+          <mc:Choice Requires="a14">
             <p:sp>
               <p:nvSpPr>
                 <p:cNvPr id="3" name="TextBox 2">
@@ -30889,6 +30865,7 @@
                 </a:bodyPr>
                 <a:lstStyle/>
                 <a:p>
+                  <a:pPr/>
                   <a14:m>
                     <m:oMathPara xmlns:m="http://schemas.openxmlformats.org/officeDocument/2006/math">
                       <m:oMathParaPr>
@@ -30934,7 +30911,7 @@
               </p:txBody>
             </p:sp>
           </mc:Choice>
-          <mc:Fallback>
+          <mc:Fallback xmlns="">
             <p:sp>
               <p:nvSpPr>
                 <p:cNvPr id="3" name="TextBox 2">
@@ -31095,8 +31072,8 @@
             </a:p>
           </p:txBody>
         </p:sp>
-        <mc:AlternateContent xmlns:mc="http://schemas.openxmlformats.org/markup-compatibility/2006">
-          <mc:Choice xmlns:a14="http://schemas.microsoft.com/office/drawing/2010/main" Requires="a14">
+        <mc:AlternateContent xmlns:mc="http://schemas.openxmlformats.org/markup-compatibility/2006" xmlns:a14="http://schemas.microsoft.com/office/drawing/2010/main">
+          <mc:Choice Requires="a14">
             <p:sp>
               <p:nvSpPr>
                 <p:cNvPr id="6" name="TextBox 5">
@@ -31125,6 +31102,7 @@
                 </a:bodyPr>
                 <a:lstStyle/>
                 <a:p>
+                  <a:pPr/>
                   <a14:m>
                     <m:oMathPara xmlns:m="http://schemas.openxmlformats.org/officeDocument/2006/math">
                       <m:oMathParaPr>
@@ -31145,7 +31123,7 @@
               </p:txBody>
             </p:sp>
           </mc:Choice>
-          <mc:Fallback>
+          <mc:Fallback xmlns="">
             <p:sp>
               <p:nvSpPr>
                 <p:cNvPr id="6" name="TextBox 5">
@@ -31190,8 +31168,8 @@
             </p:sp>
           </mc:Fallback>
         </mc:AlternateContent>
-        <mc:AlternateContent xmlns:mc="http://schemas.openxmlformats.org/markup-compatibility/2006">
-          <mc:Choice xmlns:a14="http://schemas.microsoft.com/office/drawing/2010/main" Requires="a14">
+        <mc:AlternateContent xmlns:mc="http://schemas.openxmlformats.org/markup-compatibility/2006" xmlns:a14="http://schemas.microsoft.com/office/drawing/2010/main">
+          <mc:Choice Requires="a14">
             <p:sp>
               <p:nvSpPr>
                 <p:cNvPr id="9" name="TextBox 8">
@@ -31220,6 +31198,7 @@
                 </a:bodyPr>
                 <a:lstStyle/>
                 <a:p>
+                  <a:pPr/>
                   <a14:m>
                     <m:oMathPara xmlns:m="http://schemas.openxmlformats.org/officeDocument/2006/math">
                       <m:oMathParaPr>
@@ -31240,7 +31219,7 @@
               </p:txBody>
             </p:sp>
           </mc:Choice>
-          <mc:Fallback>
+          <mc:Fallback xmlns="">
             <p:sp>
               <p:nvSpPr>
                 <p:cNvPr id="9" name="TextBox 8">
@@ -31285,8 +31264,8 @@
             </p:sp>
           </mc:Fallback>
         </mc:AlternateContent>
-        <mc:AlternateContent xmlns:mc="http://schemas.openxmlformats.org/markup-compatibility/2006">
-          <mc:Choice xmlns:a14="http://schemas.microsoft.com/office/drawing/2010/main" Requires="a14">
+        <mc:AlternateContent xmlns:mc="http://schemas.openxmlformats.org/markup-compatibility/2006" xmlns:a14="http://schemas.microsoft.com/office/drawing/2010/main">
+          <mc:Choice Requires="a14">
             <p:sp>
               <p:nvSpPr>
                 <p:cNvPr id="27" name="TextBox 26">
@@ -31315,6 +31294,7 @@
                 </a:bodyPr>
                 <a:lstStyle/>
                 <a:p>
+                  <a:pPr/>
                   <a14:m>
                     <m:oMathPara xmlns:m="http://schemas.openxmlformats.org/officeDocument/2006/math">
                       <m:oMathParaPr>
@@ -31379,7 +31359,7 @@
               </p:txBody>
             </p:sp>
           </mc:Choice>
-          <mc:Fallback>
+          <mc:Fallback xmlns="">
             <p:sp>
               <p:nvSpPr>
                 <p:cNvPr id="27" name="TextBox 26">
@@ -31540,8 +31520,8 @@
             </a:p>
           </p:txBody>
         </p:sp>
-        <mc:AlternateContent xmlns:mc="http://schemas.openxmlformats.org/markup-compatibility/2006">
-          <mc:Choice xmlns:a14="http://schemas.microsoft.com/office/drawing/2010/main" Requires="a14">
+        <mc:AlternateContent xmlns:mc="http://schemas.openxmlformats.org/markup-compatibility/2006" xmlns:a14="http://schemas.microsoft.com/office/drawing/2010/main">
+          <mc:Choice Requires="a14">
             <p:sp>
               <p:nvSpPr>
                 <p:cNvPr id="30" name="TextBox 29">
@@ -31570,6 +31550,7 @@
                 </a:bodyPr>
                 <a:lstStyle/>
                 <a:p>
+                  <a:pPr/>
                   <a14:m>
                     <m:oMathPara xmlns:m="http://schemas.openxmlformats.org/officeDocument/2006/math">
                       <m:oMathParaPr>
@@ -31590,7 +31571,7 @@
               </p:txBody>
             </p:sp>
           </mc:Choice>
-          <mc:Fallback>
+          <mc:Fallback xmlns="">
             <p:sp>
               <p:nvSpPr>
                 <p:cNvPr id="30" name="TextBox 29">
@@ -31635,8 +31616,8 @@
             </p:sp>
           </mc:Fallback>
         </mc:AlternateContent>
-        <mc:AlternateContent xmlns:mc="http://schemas.openxmlformats.org/markup-compatibility/2006">
-          <mc:Choice xmlns:a14="http://schemas.microsoft.com/office/drawing/2010/main" Requires="a14">
+        <mc:AlternateContent xmlns:mc="http://schemas.openxmlformats.org/markup-compatibility/2006" xmlns:a14="http://schemas.microsoft.com/office/drawing/2010/main">
+          <mc:Choice Requires="a14">
             <p:sp>
               <p:nvSpPr>
                 <p:cNvPr id="31" name="TextBox 30">
@@ -31665,6 +31646,7 @@
                 </a:bodyPr>
                 <a:lstStyle/>
                 <a:p>
+                  <a:pPr/>
                   <a14:m>
                     <m:oMathPara xmlns:m="http://schemas.openxmlformats.org/officeDocument/2006/math">
                       <m:oMathParaPr>
@@ -31685,7 +31667,7 @@
               </p:txBody>
             </p:sp>
           </mc:Choice>
-          <mc:Fallback>
+          <mc:Fallback xmlns="">
             <p:sp>
               <p:nvSpPr>
                 <p:cNvPr id="31" name="TextBox 30">
@@ -31846,8 +31828,8 @@
             </a:p>
           </p:txBody>
         </p:sp>
-        <mc:AlternateContent xmlns:mc="http://schemas.openxmlformats.org/markup-compatibility/2006">
-          <mc:Choice xmlns:a14="http://schemas.microsoft.com/office/drawing/2010/main" Requires="a14">
+        <mc:AlternateContent xmlns:mc="http://schemas.openxmlformats.org/markup-compatibility/2006" xmlns:a14="http://schemas.microsoft.com/office/drawing/2010/main">
+          <mc:Choice Requires="a14">
             <p:sp>
               <p:nvSpPr>
                 <p:cNvPr id="34" name="TextBox 33">
@@ -31876,6 +31858,7 @@
                 </a:bodyPr>
                 <a:lstStyle/>
                 <a:p>
+                  <a:pPr/>
                   <a14:m>
                     <m:oMathPara xmlns:m="http://schemas.openxmlformats.org/officeDocument/2006/math">
                       <m:oMathParaPr>
@@ -31896,7 +31879,7 @@
               </p:txBody>
             </p:sp>
           </mc:Choice>
-          <mc:Fallback>
+          <mc:Fallback xmlns="">
             <p:sp>
               <p:nvSpPr>
                 <p:cNvPr id="34" name="TextBox 33">
@@ -31941,8 +31924,8 @@
             </p:sp>
           </mc:Fallback>
         </mc:AlternateContent>
-        <mc:AlternateContent xmlns:mc="http://schemas.openxmlformats.org/markup-compatibility/2006">
-          <mc:Choice xmlns:a14="http://schemas.microsoft.com/office/drawing/2010/main" Requires="a14">
+        <mc:AlternateContent xmlns:mc="http://schemas.openxmlformats.org/markup-compatibility/2006" xmlns:a14="http://schemas.microsoft.com/office/drawing/2010/main">
+          <mc:Choice Requires="a14">
             <p:sp>
               <p:nvSpPr>
                 <p:cNvPr id="35" name="TextBox 34">
@@ -31971,6 +31954,7 @@
                 </a:bodyPr>
                 <a:lstStyle/>
                 <a:p>
+                  <a:pPr/>
                   <a14:m>
                     <m:oMathPara xmlns:m="http://schemas.openxmlformats.org/officeDocument/2006/math">
                       <m:oMathParaPr>
@@ -31991,7 +31975,7 @@
               </p:txBody>
             </p:sp>
           </mc:Choice>
-          <mc:Fallback>
+          <mc:Fallback xmlns="">
             <p:sp>
               <p:nvSpPr>
                 <p:cNvPr id="35" name="TextBox 34">
@@ -32036,8 +32020,8 @@
             </p:sp>
           </mc:Fallback>
         </mc:AlternateContent>
-        <mc:AlternateContent xmlns:mc="http://schemas.openxmlformats.org/markup-compatibility/2006">
-          <mc:Choice xmlns:a14="http://schemas.microsoft.com/office/drawing/2010/main" Requires="a14">
+        <mc:AlternateContent xmlns:mc="http://schemas.openxmlformats.org/markup-compatibility/2006" xmlns:a14="http://schemas.microsoft.com/office/drawing/2010/main">
+          <mc:Choice Requires="a14">
             <p:sp>
               <p:nvSpPr>
                 <p:cNvPr id="36" name="TextBox 35">
@@ -32066,6 +32050,7 @@
                 </a:bodyPr>
                 <a:lstStyle/>
                 <a:p>
+                  <a:pPr/>
                   <a14:m>
                     <m:oMathPara xmlns:m="http://schemas.openxmlformats.org/officeDocument/2006/math">
                       <m:oMathParaPr>
@@ -32086,7 +32071,7 @@
               </p:txBody>
             </p:sp>
           </mc:Choice>
-          <mc:Fallback>
+          <mc:Fallback xmlns="">
             <p:sp>
               <p:nvSpPr>
                 <p:cNvPr id="36" name="TextBox 35">
@@ -32247,8 +32232,8 @@
             </a:p>
           </p:txBody>
         </p:sp>
-        <mc:AlternateContent xmlns:mc="http://schemas.openxmlformats.org/markup-compatibility/2006">
-          <mc:Choice xmlns:a14="http://schemas.microsoft.com/office/drawing/2010/main" Requires="a14">
+        <mc:AlternateContent xmlns:mc="http://schemas.openxmlformats.org/markup-compatibility/2006" xmlns:a14="http://schemas.microsoft.com/office/drawing/2010/main">
+          <mc:Choice Requires="a14">
             <p:sp>
               <p:nvSpPr>
                 <p:cNvPr id="39" name="TextBox 38">
@@ -32277,6 +32262,7 @@
                 </a:bodyPr>
                 <a:lstStyle/>
                 <a:p>
+                  <a:pPr/>
                   <a14:m>
                     <m:oMathPara xmlns:m="http://schemas.openxmlformats.org/officeDocument/2006/math">
                       <m:oMathParaPr>
@@ -32297,7 +32283,7 @@
               </p:txBody>
             </p:sp>
           </mc:Choice>
-          <mc:Fallback>
+          <mc:Fallback xmlns="">
             <p:sp>
               <p:nvSpPr>
                 <p:cNvPr id="39" name="TextBox 38">
@@ -32342,8 +32328,8 @@
             </p:sp>
           </mc:Fallback>
         </mc:AlternateContent>
-        <mc:AlternateContent xmlns:mc="http://schemas.openxmlformats.org/markup-compatibility/2006">
-          <mc:Choice xmlns:a14="http://schemas.microsoft.com/office/drawing/2010/main" Requires="a14">
+        <mc:AlternateContent xmlns:mc="http://schemas.openxmlformats.org/markup-compatibility/2006" xmlns:a14="http://schemas.microsoft.com/office/drawing/2010/main">
+          <mc:Choice Requires="a14">
             <p:sp>
               <p:nvSpPr>
                 <p:cNvPr id="40" name="TextBox 39">
@@ -32372,6 +32358,7 @@
                 </a:bodyPr>
                 <a:lstStyle/>
                 <a:p>
+                  <a:pPr/>
                   <a14:m>
                     <m:oMathPara xmlns:m="http://schemas.openxmlformats.org/officeDocument/2006/math">
                       <m:oMathParaPr>
@@ -32392,7 +32379,7 @@
               </p:txBody>
             </p:sp>
           </mc:Choice>
-          <mc:Fallback>
+          <mc:Fallback xmlns="">
             <p:sp>
               <p:nvSpPr>
                 <p:cNvPr id="40" name="TextBox 39">
@@ -32651,8 +32638,8 @@
           </a:p>
         </p:txBody>
       </p:sp>
-      <mc:AlternateContent xmlns:mc="http://schemas.openxmlformats.org/markup-compatibility/2006">
-        <mc:Choice xmlns:a14="http://schemas.microsoft.com/office/drawing/2010/main" Requires="a14">
+      <mc:AlternateContent xmlns:mc="http://schemas.openxmlformats.org/markup-compatibility/2006" xmlns:a14="http://schemas.microsoft.com/office/drawing/2010/main">
+        <mc:Choice Requires="a14">
           <p:sp>
             <p:nvSpPr>
               <p:cNvPr id="2" name="TextBox 1">
@@ -32688,6 +32675,7 @@
               </a:bodyPr>
               <a:lstStyle/>
               <a:p>
+                <a:pPr/>
                 <a14:m>
                   <m:oMathPara xmlns:m="http://schemas.openxmlformats.org/officeDocument/2006/math">
                     <m:oMathParaPr>
@@ -32880,7 +32868,7 @@
             </p:txBody>
           </p:sp>
         </mc:Choice>
-        <mc:Fallback>
+        <mc:Fallback xmlns="">
           <p:sp>
             <p:nvSpPr>
               <p:cNvPr id="2" name="TextBox 1">
@@ -32932,8 +32920,8 @@
           </p:sp>
         </mc:Fallback>
       </mc:AlternateContent>
-      <mc:AlternateContent xmlns:mc="http://schemas.openxmlformats.org/markup-compatibility/2006">
-        <mc:Choice xmlns:a14="http://schemas.microsoft.com/office/drawing/2010/main" Requires="a14">
+      <mc:AlternateContent xmlns:mc="http://schemas.openxmlformats.org/markup-compatibility/2006" xmlns:a14="http://schemas.microsoft.com/office/drawing/2010/main">
+        <mc:Choice Requires="a14">
           <p:sp>
             <p:nvSpPr>
               <p:cNvPr id="10" name="TextBox 9">
@@ -32971,6 +32959,7 @@
               </a:bodyPr>
               <a:lstStyle/>
               <a:p>
+                <a:pPr/>
                 <a14:m>
                   <m:oMathPara xmlns:m="http://schemas.openxmlformats.org/officeDocument/2006/math">
                     <m:oMathParaPr>
@@ -33119,7 +33108,7 @@
             </p:txBody>
           </p:sp>
         </mc:Choice>
-        <mc:Fallback>
+        <mc:Fallback xmlns="">
           <p:sp>
             <p:nvSpPr>
               <p:cNvPr id="10" name="TextBox 9">
@@ -33247,8 +33236,8 @@
           </a:fontRef>
         </p:style>
       </p:cxnSp>
-      <mc:AlternateContent xmlns:mc="http://schemas.openxmlformats.org/markup-compatibility/2006">
-        <mc:Choice xmlns:a14="http://schemas.microsoft.com/office/drawing/2010/main" Requires="a14">
+      <mc:AlternateContent xmlns:mc="http://schemas.openxmlformats.org/markup-compatibility/2006" xmlns:a14="http://schemas.microsoft.com/office/drawing/2010/main">
+        <mc:Choice Requires="a14">
           <p:sp>
             <p:nvSpPr>
               <p:cNvPr id="46" name="TextBox 45">
@@ -33399,7 +33388,6 @@
                 <a:endParaRPr lang="en-US" dirty="0"/>
               </a:p>
               <a:p>
-                <a:pPr/>
                 <a14:m>
                   <m:oMath xmlns:m="http://schemas.openxmlformats.org/officeDocument/2006/math">
                     <m:r>
@@ -33456,11 +33444,9 @@
                 <a:endParaRPr lang="en-US" dirty="0"/>
               </a:p>
               <a:p>
-                <a:pPr/>
                 <a:endParaRPr lang="en-US" dirty="0"/>
               </a:p>
               <a:p>
-                <a:pPr/>
                 <a:r>
                   <a:rPr lang="en-US" dirty="0"/>
                   <a:t>Case 1: </a:t>
@@ -33523,7 +33509,7 @@
             </p:txBody>
           </p:sp>
         </mc:Choice>
-        <mc:Fallback>
+        <mc:Fallback xmlns="">
           <p:sp>
             <p:nvSpPr>
               <p:cNvPr id="46" name="TextBox 45">
@@ -34284,8 +34270,8 @@
             </a:p>
           </p:txBody>
         </p:sp>
-        <mc:AlternateContent xmlns:mc="http://schemas.openxmlformats.org/markup-compatibility/2006">
-          <mc:Choice xmlns:a14="http://schemas.microsoft.com/office/drawing/2010/main" Requires="a14">
+        <mc:AlternateContent xmlns:mc="http://schemas.openxmlformats.org/markup-compatibility/2006" xmlns:a14="http://schemas.microsoft.com/office/drawing/2010/main">
+          <mc:Choice Requires="a14">
             <p:sp>
               <p:nvSpPr>
                 <p:cNvPr id="11" name="TextBox 10">
@@ -34373,7 +34359,7 @@
               </p:txBody>
             </p:sp>
           </mc:Choice>
-          <mc:Fallback>
+          <mc:Fallback xmlns="">
             <p:sp>
               <p:nvSpPr>
                 <p:cNvPr id="11" name="TextBox 10">
@@ -34569,8 +34555,8 @@
             </a:p>
           </p:txBody>
         </p:sp>
-        <mc:AlternateContent xmlns:mc="http://schemas.openxmlformats.org/markup-compatibility/2006">
-          <mc:Choice xmlns:a14="http://schemas.microsoft.com/office/drawing/2010/main" Requires="a14">
+        <mc:AlternateContent xmlns:mc="http://schemas.openxmlformats.org/markup-compatibility/2006" xmlns:a14="http://schemas.microsoft.com/office/drawing/2010/main">
+          <mc:Choice Requires="a14">
             <p:sp>
               <p:nvSpPr>
                 <p:cNvPr id="22" name="TextBox 21">
@@ -34658,7 +34644,7 @@
               </p:txBody>
             </p:sp>
           </mc:Choice>
-          <mc:Fallback>
+          <mc:Fallback xmlns="">
             <p:sp>
               <p:nvSpPr>
                 <p:cNvPr id="22" name="TextBox 21">
@@ -34910,8 +34896,8 @@
             </a:p>
           </p:txBody>
         </p:sp>
-        <mc:AlternateContent xmlns:mc="http://schemas.openxmlformats.org/markup-compatibility/2006">
-          <mc:Choice xmlns:a14="http://schemas.microsoft.com/office/drawing/2010/main" Requires="a14">
+        <mc:AlternateContent xmlns:mc="http://schemas.openxmlformats.org/markup-compatibility/2006" xmlns:a14="http://schemas.microsoft.com/office/drawing/2010/main">
+          <mc:Choice Requires="a14">
             <p:sp>
               <p:nvSpPr>
                 <p:cNvPr id="3" name="TextBox 2">
@@ -34940,6 +34926,7 @@
                 </a:bodyPr>
                 <a:lstStyle/>
                 <a:p>
+                  <a:pPr/>
                   <a14:m>
                     <m:oMathPara xmlns:m="http://schemas.openxmlformats.org/officeDocument/2006/math">
                       <m:oMathParaPr>
@@ -34985,7 +34972,7 @@
               </p:txBody>
             </p:sp>
           </mc:Choice>
-          <mc:Fallback>
+          <mc:Fallback xmlns="">
             <p:sp>
               <p:nvSpPr>
                 <p:cNvPr id="3" name="TextBox 2">
@@ -35146,8 +35133,8 @@
             </a:p>
           </p:txBody>
         </p:sp>
-        <mc:AlternateContent xmlns:mc="http://schemas.openxmlformats.org/markup-compatibility/2006">
-          <mc:Choice xmlns:a14="http://schemas.microsoft.com/office/drawing/2010/main" Requires="a14">
+        <mc:AlternateContent xmlns:mc="http://schemas.openxmlformats.org/markup-compatibility/2006" xmlns:a14="http://schemas.microsoft.com/office/drawing/2010/main">
+          <mc:Choice Requires="a14">
             <p:sp>
               <p:nvSpPr>
                 <p:cNvPr id="6" name="TextBox 5">
@@ -35176,6 +35163,7 @@
                 </a:bodyPr>
                 <a:lstStyle/>
                 <a:p>
+                  <a:pPr/>
                   <a14:m>
                     <m:oMathPara xmlns:m="http://schemas.openxmlformats.org/officeDocument/2006/math">
                       <m:oMathParaPr>
@@ -35196,7 +35184,7 @@
               </p:txBody>
             </p:sp>
           </mc:Choice>
-          <mc:Fallback>
+          <mc:Fallback xmlns="">
             <p:sp>
               <p:nvSpPr>
                 <p:cNvPr id="6" name="TextBox 5">
@@ -35241,8 +35229,8 @@
             </p:sp>
           </mc:Fallback>
         </mc:AlternateContent>
-        <mc:AlternateContent xmlns:mc="http://schemas.openxmlformats.org/markup-compatibility/2006">
-          <mc:Choice xmlns:a14="http://schemas.microsoft.com/office/drawing/2010/main" Requires="a14">
+        <mc:AlternateContent xmlns:mc="http://schemas.openxmlformats.org/markup-compatibility/2006" xmlns:a14="http://schemas.microsoft.com/office/drawing/2010/main">
+          <mc:Choice Requires="a14">
             <p:sp>
               <p:nvSpPr>
                 <p:cNvPr id="9" name="TextBox 8">
@@ -35271,6 +35259,7 @@
                 </a:bodyPr>
                 <a:lstStyle/>
                 <a:p>
+                  <a:pPr/>
                   <a14:m>
                     <m:oMathPara xmlns:m="http://schemas.openxmlformats.org/officeDocument/2006/math">
                       <m:oMathParaPr>
@@ -35291,7 +35280,7 @@
               </p:txBody>
             </p:sp>
           </mc:Choice>
-          <mc:Fallback>
+          <mc:Fallback xmlns="">
             <p:sp>
               <p:nvSpPr>
                 <p:cNvPr id="9" name="TextBox 8">
@@ -35336,8 +35325,8 @@
             </p:sp>
           </mc:Fallback>
         </mc:AlternateContent>
-        <mc:AlternateContent xmlns:mc="http://schemas.openxmlformats.org/markup-compatibility/2006">
-          <mc:Choice xmlns:a14="http://schemas.microsoft.com/office/drawing/2010/main" Requires="a14">
+        <mc:AlternateContent xmlns:mc="http://schemas.openxmlformats.org/markup-compatibility/2006" xmlns:a14="http://schemas.microsoft.com/office/drawing/2010/main">
+          <mc:Choice Requires="a14">
             <p:sp>
               <p:nvSpPr>
                 <p:cNvPr id="27" name="TextBox 26">
@@ -35366,6 +35355,7 @@
                 </a:bodyPr>
                 <a:lstStyle/>
                 <a:p>
+                  <a:pPr/>
                   <a14:m>
                     <m:oMathPara xmlns:m="http://schemas.openxmlformats.org/officeDocument/2006/math">
                       <m:oMathParaPr>
@@ -35430,7 +35420,7 @@
               </p:txBody>
             </p:sp>
           </mc:Choice>
-          <mc:Fallback>
+          <mc:Fallback xmlns="">
             <p:sp>
               <p:nvSpPr>
                 <p:cNvPr id="27" name="TextBox 26">
@@ -35591,8 +35581,8 @@
             </a:p>
           </p:txBody>
         </p:sp>
-        <mc:AlternateContent xmlns:mc="http://schemas.openxmlformats.org/markup-compatibility/2006">
-          <mc:Choice xmlns:a14="http://schemas.microsoft.com/office/drawing/2010/main" Requires="a14">
+        <mc:AlternateContent xmlns:mc="http://schemas.openxmlformats.org/markup-compatibility/2006" xmlns:a14="http://schemas.microsoft.com/office/drawing/2010/main">
+          <mc:Choice Requires="a14">
             <p:sp>
               <p:nvSpPr>
                 <p:cNvPr id="30" name="TextBox 29">
@@ -35621,6 +35611,7 @@
                 </a:bodyPr>
                 <a:lstStyle/>
                 <a:p>
+                  <a:pPr/>
                   <a14:m>
                     <m:oMathPara xmlns:m="http://schemas.openxmlformats.org/officeDocument/2006/math">
                       <m:oMathParaPr>
@@ -35641,7 +35632,7 @@
               </p:txBody>
             </p:sp>
           </mc:Choice>
-          <mc:Fallback>
+          <mc:Fallback xmlns="">
             <p:sp>
               <p:nvSpPr>
                 <p:cNvPr id="30" name="TextBox 29">
@@ -35686,8 +35677,8 @@
             </p:sp>
           </mc:Fallback>
         </mc:AlternateContent>
-        <mc:AlternateContent xmlns:mc="http://schemas.openxmlformats.org/markup-compatibility/2006">
-          <mc:Choice xmlns:a14="http://schemas.microsoft.com/office/drawing/2010/main" Requires="a14">
+        <mc:AlternateContent xmlns:mc="http://schemas.openxmlformats.org/markup-compatibility/2006" xmlns:a14="http://schemas.microsoft.com/office/drawing/2010/main">
+          <mc:Choice Requires="a14">
             <p:sp>
               <p:nvSpPr>
                 <p:cNvPr id="31" name="TextBox 30">
@@ -35716,6 +35707,7 @@
                 </a:bodyPr>
                 <a:lstStyle/>
                 <a:p>
+                  <a:pPr/>
                   <a14:m>
                     <m:oMathPara xmlns:m="http://schemas.openxmlformats.org/officeDocument/2006/math">
                       <m:oMathParaPr>
@@ -35736,7 +35728,7 @@
               </p:txBody>
             </p:sp>
           </mc:Choice>
-          <mc:Fallback>
+          <mc:Fallback xmlns="">
             <p:sp>
               <p:nvSpPr>
                 <p:cNvPr id="31" name="TextBox 30">
@@ -35897,8 +35889,8 @@
             </a:p>
           </p:txBody>
         </p:sp>
-        <mc:AlternateContent xmlns:mc="http://schemas.openxmlformats.org/markup-compatibility/2006">
-          <mc:Choice xmlns:a14="http://schemas.microsoft.com/office/drawing/2010/main" Requires="a14">
+        <mc:AlternateContent xmlns:mc="http://schemas.openxmlformats.org/markup-compatibility/2006" xmlns:a14="http://schemas.microsoft.com/office/drawing/2010/main">
+          <mc:Choice Requires="a14">
             <p:sp>
               <p:nvSpPr>
                 <p:cNvPr id="34" name="TextBox 33">
@@ -35927,6 +35919,7 @@
                 </a:bodyPr>
                 <a:lstStyle/>
                 <a:p>
+                  <a:pPr/>
                   <a14:m>
                     <m:oMathPara xmlns:m="http://schemas.openxmlformats.org/officeDocument/2006/math">
                       <m:oMathParaPr>
@@ -35947,7 +35940,7 @@
               </p:txBody>
             </p:sp>
           </mc:Choice>
-          <mc:Fallback>
+          <mc:Fallback xmlns="">
             <p:sp>
               <p:nvSpPr>
                 <p:cNvPr id="34" name="TextBox 33">
@@ -35992,8 +35985,8 @@
             </p:sp>
           </mc:Fallback>
         </mc:AlternateContent>
-        <mc:AlternateContent xmlns:mc="http://schemas.openxmlformats.org/markup-compatibility/2006">
-          <mc:Choice xmlns:a14="http://schemas.microsoft.com/office/drawing/2010/main" Requires="a14">
+        <mc:AlternateContent xmlns:mc="http://schemas.openxmlformats.org/markup-compatibility/2006" xmlns:a14="http://schemas.microsoft.com/office/drawing/2010/main">
+          <mc:Choice Requires="a14">
             <p:sp>
               <p:nvSpPr>
                 <p:cNvPr id="35" name="TextBox 34">
@@ -36022,6 +36015,7 @@
                 </a:bodyPr>
                 <a:lstStyle/>
                 <a:p>
+                  <a:pPr/>
                   <a14:m>
                     <m:oMathPara xmlns:m="http://schemas.openxmlformats.org/officeDocument/2006/math">
                       <m:oMathParaPr>
@@ -36042,7 +36036,7 @@
               </p:txBody>
             </p:sp>
           </mc:Choice>
-          <mc:Fallback>
+          <mc:Fallback xmlns="">
             <p:sp>
               <p:nvSpPr>
                 <p:cNvPr id="35" name="TextBox 34">
@@ -36087,8 +36081,8 @@
             </p:sp>
           </mc:Fallback>
         </mc:AlternateContent>
-        <mc:AlternateContent xmlns:mc="http://schemas.openxmlformats.org/markup-compatibility/2006">
-          <mc:Choice xmlns:a14="http://schemas.microsoft.com/office/drawing/2010/main" Requires="a14">
+        <mc:AlternateContent xmlns:mc="http://schemas.openxmlformats.org/markup-compatibility/2006" xmlns:a14="http://schemas.microsoft.com/office/drawing/2010/main">
+          <mc:Choice Requires="a14">
             <p:sp>
               <p:nvSpPr>
                 <p:cNvPr id="36" name="TextBox 35">
@@ -36117,6 +36111,7 @@
                 </a:bodyPr>
                 <a:lstStyle/>
                 <a:p>
+                  <a:pPr/>
                   <a14:m>
                     <m:oMathPara xmlns:m="http://schemas.openxmlformats.org/officeDocument/2006/math">
                       <m:oMathParaPr>
@@ -36137,7 +36132,7 @@
               </p:txBody>
             </p:sp>
           </mc:Choice>
-          <mc:Fallback>
+          <mc:Fallback xmlns="">
             <p:sp>
               <p:nvSpPr>
                 <p:cNvPr id="36" name="TextBox 35">
@@ -36298,8 +36293,8 @@
             </a:p>
           </p:txBody>
         </p:sp>
-        <mc:AlternateContent xmlns:mc="http://schemas.openxmlformats.org/markup-compatibility/2006">
-          <mc:Choice xmlns:a14="http://schemas.microsoft.com/office/drawing/2010/main" Requires="a14">
+        <mc:AlternateContent xmlns:mc="http://schemas.openxmlformats.org/markup-compatibility/2006" xmlns:a14="http://schemas.microsoft.com/office/drawing/2010/main">
+          <mc:Choice Requires="a14">
             <p:sp>
               <p:nvSpPr>
                 <p:cNvPr id="39" name="TextBox 38">
@@ -36328,6 +36323,7 @@
                 </a:bodyPr>
                 <a:lstStyle/>
                 <a:p>
+                  <a:pPr/>
                   <a14:m>
                     <m:oMathPara xmlns:m="http://schemas.openxmlformats.org/officeDocument/2006/math">
                       <m:oMathParaPr>
@@ -36348,7 +36344,7 @@
               </p:txBody>
             </p:sp>
           </mc:Choice>
-          <mc:Fallback>
+          <mc:Fallback xmlns="">
             <p:sp>
               <p:nvSpPr>
                 <p:cNvPr id="39" name="TextBox 38">
@@ -36393,8 +36389,8 @@
             </p:sp>
           </mc:Fallback>
         </mc:AlternateContent>
-        <mc:AlternateContent xmlns:mc="http://schemas.openxmlformats.org/markup-compatibility/2006">
-          <mc:Choice xmlns:a14="http://schemas.microsoft.com/office/drawing/2010/main" Requires="a14">
+        <mc:AlternateContent xmlns:mc="http://schemas.openxmlformats.org/markup-compatibility/2006" xmlns:a14="http://schemas.microsoft.com/office/drawing/2010/main">
+          <mc:Choice Requires="a14">
             <p:sp>
               <p:nvSpPr>
                 <p:cNvPr id="40" name="TextBox 39">
@@ -36423,6 +36419,7 @@
                 </a:bodyPr>
                 <a:lstStyle/>
                 <a:p>
+                  <a:pPr/>
                   <a14:m>
                     <m:oMathPara xmlns:m="http://schemas.openxmlformats.org/officeDocument/2006/math">
                       <m:oMathParaPr>
@@ -36443,7 +36440,7 @@
               </p:txBody>
             </p:sp>
           </mc:Choice>
-          <mc:Fallback>
+          <mc:Fallback xmlns="">
             <p:sp>
               <p:nvSpPr>
                 <p:cNvPr id="40" name="TextBox 39">
